--- a/Presentation2(1).pptx
+++ b/Presentation2(1).pptx
@@ -5,7 +5,7 @@
     <p:sldMasterId id="2147483708" r:id="rId3"/>
   </p:sldMasterIdLst>
   <p:notesMasterIdLst>
-    <p:notesMasterId r:id="rId13"/>
+    <p:notesMasterId r:id="rId15"/>
   </p:notesMasterIdLst>
   <p:sldIdLst>
     <p:sldId id="257" r:id="rId4"/>
@@ -17,11 +17,13 @@
     <p:sldId id="2147482442" r:id="rId10"/>
     <p:sldId id="2147482443" r:id="rId11"/>
     <p:sldId id="300" r:id="rId12"/>
+    <p:sldId id="2147482444" r:id="rId13"/>
+    <p:sldId id="318" r:id="rId14"/>
   </p:sldIdLst>
   <p:sldSz cx="10969625" cy="6170613"/>
   <p:notesSz cx="6858000" cy="9144000"/>
   <p:custDataLst>
-    <p:tags r:id="rId14"/>
+    <p:tags r:id="rId16"/>
   </p:custDataLst>
   <p:defaultTextStyle>
     <a:defPPr>
@@ -246,7 +248,7 @@
           <a:p>
             <a:fld id="{6007911F-CEAF-4F0B-98BD-EFB38C6572AA}" type="datetimeFigureOut">
               <a:rPr lang="de-DE" smtClean="0"/>
-              <a:t>15.07.2026</a:t>
+              <a:t>17.08.2026</a:t>
             </a:fld>
             <a:endParaRPr lang="de-DE"/>
           </a:p>
@@ -9015,6 +9017,2838 @@
 </p:sld>
 </file>
 
+<file path=ppt/slides/slide10.xml><?xml version="1.0" encoding="utf-8"?>
+<p:sld xmlns:a="http://schemas.openxmlformats.org/drawingml/2006/main" xmlns:r="http://schemas.openxmlformats.org/officeDocument/2006/relationships" xmlns:p="http://schemas.openxmlformats.org/presentationml/2006/main">
+  <p:cSld>
+    <p:spTree>
+      <p:nvGrpSpPr>
+        <p:cNvPr id="1" name="">
+          <a:extLst>
+            <a:ext uri="{FF2B5EF4-FFF2-40B4-BE49-F238E27FC236}">
+              <a16:creationId xmlns:a16="http://schemas.microsoft.com/office/drawing/2014/main" id="{2FF3D79E-3F36-0368-F53A-8913E9E1E9F2}"/>
+            </a:ext>
+          </a:extLst>
+        </p:cNvPr>
+        <p:cNvGrpSpPr/>
+        <p:nvPr/>
+      </p:nvGrpSpPr>
+      <p:grpSpPr>
+        <a:xfrm>
+          <a:off x="0" y="0"/>
+          <a:ext cx="0" cy="0"/>
+          <a:chOff x="0" y="0"/>
+          <a:chExt cx="0" cy="0"/>
+        </a:xfrm>
+      </p:grpSpPr>
+      <p:sp>
+        <p:nvSpPr>
+          <p:cNvPr id="5" name="Titel 4">
+            <a:extLst>
+              <a:ext uri="{FF2B5EF4-FFF2-40B4-BE49-F238E27FC236}">
+                <a16:creationId xmlns:a16="http://schemas.microsoft.com/office/drawing/2014/main" id="{83C6CB55-5A94-1E72-356B-23B21CFF2BB4}"/>
+              </a:ext>
+            </a:extLst>
+          </p:cNvPr>
+          <p:cNvSpPr>
+            <a:spLocks noGrp="1"/>
+          </p:cNvSpPr>
+          <p:nvPr>
+            <p:ph type="title"/>
+          </p:nvPr>
+        </p:nvSpPr>
+        <p:spPr>
+          <a:xfrm>
+            <a:off x="205200" y="648000"/>
+            <a:ext cx="10558800" cy="388800"/>
+          </a:xfrm>
+        </p:spPr>
+        <p:txBody>
+          <a:bodyPr lIns="0" tIns="0" rIns="0" bIns="0"/>
+          <a:lstStyle/>
+          <a:p>
+            <a:r>
+              <a:rPr lang="de-DE" dirty="0"/>
+              <a:t>Control Tower</a:t>
+            </a:r>
+          </a:p>
+        </p:txBody>
+      </p:sp>
+      <p:sp>
+        <p:nvSpPr>
+          <p:cNvPr id="3" name="chapter_conv">
+            <a:extLst>
+              <a:ext uri="{FF2B5EF4-FFF2-40B4-BE49-F238E27FC236}">
+                <a16:creationId xmlns:a16="http://schemas.microsoft.com/office/drawing/2014/main" id="{66EB018D-36B3-39EC-2B18-48341F690FB0}"/>
+              </a:ext>
+            </a:extLst>
+          </p:cNvPr>
+          <p:cNvSpPr>
+            <a:spLocks noGrp="1"/>
+          </p:cNvSpPr>
+          <p:nvPr>
+            <p:ph type="body" sz="quarter" idx="15"/>
+          </p:nvPr>
+        </p:nvSpPr>
+        <p:spPr>
+          <a:xfrm>
+            <a:off x="205200" y="259200"/>
+            <a:ext cx="10558800" cy="388800"/>
+          </a:xfrm>
+        </p:spPr>
+        <p:txBody>
+          <a:bodyPr vert="horz" lIns="0" tIns="0" rIns="0" bIns="0" rtlCol="0">
+            <a:noAutofit/>
+          </a:bodyPr>
+          <a:lstStyle/>
+          <a:p>
+            <a:r>
+              <a:rPr lang="de-DE" dirty="0"/>
+              <a:t>Results &amp; Next Steps</a:t>
+            </a:r>
+          </a:p>
+        </p:txBody>
+      </p:sp>
+      <p:pic>
+        <p:nvPicPr>
+          <p:cNvPr id="17" name="Grafik 16">
+            <a:extLst>
+              <a:ext uri="{FF2B5EF4-FFF2-40B4-BE49-F238E27FC236}">
+                <a16:creationId xmlns:a16="http://schemas.microsoft.com/office/drawing/2014/main" id="{9C5CD914-36E0-1CAE-7CA2-D70CF7257A8C}"/>
+              </a:ext>
+            </a:extLst>
+          </p:cNvPr>
+          <p:cNvPicPr>
+            <a:picLocks noChangeAspect="1"/>
+          </p:cNvPicPr>
+          <p:nvPr/>
+        </p:nvPicPr>
+        <p:blipFill>
+          <a:blip>
+            <a:extLst>
+              <a:ext uri="{28A0092B-C50C-407E-A947-70E740481C1C}">
+                <a14:useLocalDpi xmlns:a14="http://schemas.microsoft.com/office/drawing/2010/main" val="0"/>
+              </a:ext>
+              <a:ext uri="{96DAC541-7B7A-43D3-8B79-37D633B846F1}">
+                <asvg:svgBlip xmlns:asvg="http://schemas.microsoft.com/office/drawing/2016/SVG/main" r:embed="rId4"/>
+              </a:ext>
+            </a:extLst>
+          </a:blip>
+          <a:stretch>
+            <a:fillRect/>
+          </a:stretch>
+        </p:blipFill>
+        <p:spPr>
+          <a:xfrm>
+            <a:off x="2312580" y="3667436"/>
+            <a:ext cx="899999" cy="899999"/>
+          </a:xfrm>
+          <a:prstGeom prst="rect">
+            <a:avLst/>
+          </a:prstGeom>
+        </p:spPr>
+      </p:pic>
+      <p:sp>
+        <p:nvSpPr>
+          <p:cNvPr id="2" name="Foliennummernplatzhalter 1">
+            <a:extLst>
+              <a:ext uri="{FF2B5EF4-FFF2-40B4-BE49-F238E27FC236}">
+                <a16:creationId xmlns:a16="http://schemas.microsoft.com/office/drawing/2014/main" id="{44509FB4-F9B3-7325-AF50-F0E7FB25F3CA}"/>
+              </a:ext>
+            </a:extLst>
+          </p:cNvPr>
+          <p:cNvSpPr>
+            <a:spLocks noGrp="1"/>
+          </p:cNvSpPr>
+          <p:nvPr>
+            <p:ph type="sldNum" sz="quarter" idx="12"/>
+          </p:nvPr>
+        </p:nvSpPr>
+        <p:spPr/>
+        <p:txBody>
+          <a:bodyPr/>
+          <a:lstStyle/>
+          <a:p>
+            <a:fld id="{4898AEC0-503E-4FA4-859C-D0F72D6E3F79}" type="slidenum">
+              <a:rPr lang="en-US" noProof="1" smtClean="0"/>
+              <a:pPr/>
+              <a:t>10</a:t>
+            </a:fld>
+            <a:endParaRPr lang="en-US" noProof="1"/>
+          </a:p>
+        </p:txBody>
+      </p:sp>
+      <p:pic>
+        <p:nvPicPr>
+          <p:cNvPr id="12" name="Graphic 11">
+            <a:extLst>
+              <a:ext uri="{FF2B5EF4-FFF2-40B4-BE49-F238E27FC236}">
+                <a16:creationId xmlns:a16="http://schemas.microsoft.com/office/drawing/2014/main" id="{622C546D-26DD-D267-7472-26840762965F}"/>
+              </a:ext>
+            </a:extLst>
+          </p:cNvPr>
+          <p:cNvPicPr>
+            <a:picLocks noChangeAspect="1"/>
+          </p:cNvPicPr>
+          <p:nvPr/>
+        </p:nvPicPr>
+        <p:blipFill>
+          <a:blip>
+            <a:extLst>
+              <a:ext uri="{28A0092B-C50C-407E-A947-70E740481C1C}">
+                <a14:useLocalDpi xmlns:a14="http://schemas.microsoft.com/office/drawing/2010/main" val="0"/>
+              </a:ext>
+              <a:ext uri="{96DAC541-7B7A-43D3-8B79-37D633B846F1}">
+                <asvg:svgBlip xmlns:asvg="http://schemas.microsoft.com/office/drawing/2016/SVG/main" r:embed="rId5"/>
+              </a:ext>
+            </a:extLst>
+          </a:blip>
+          <a:stretch>
+            <a:fillRect/>
+          </a:stretch>
+        </p:blipFill>
+        <p:spPr>
+          <a:xfrm>
+            <a:off x="7695135" y="3639416"/>
+            <a:ext cx="928019" cy="928019"/>
+          </a:xfrm>
+          <a:prstGeom prst="rect">
+            <a:avLst/>
+          </a:prstGeom>
+        </p:spPr>
+      </p:pic>
+      <p:pic>
+        <p:nvPicPr>
+          <p:cNvPr id="7" name="Picture 6">
+            <a:extLst>
+              <a:ext uri="{FF2B5EF4-FFF2-40B4-BE49-F238E27FC236}">
+                <a16:creationId xmlns:a16="http://schemas.microsoft.com/office/drawing/2014/main" id="{F7654302-96E4-CA40-AEAC-00227C949522}"/>
+              </a:ext>
+              <a:ext uri="{C183D7F6-B498-43B3-948B-1728B52AA6E4}">
+                <adec:decorative xmlns:adec="http://schemas.microsoft.com/office/drawing/2017/decorative" val="1"/>
+              </a:ext>
+            </a:extLst>
+          </p:cNvPr>
+          <p:cNvPicPr>
+            <a:picLocks noChangeAspect="1"/>
+          </p:cNvPicPr>
+          <p:nvPr/>
+        </p:nvPicPr>
+        <p:blipFill>
+          <a:blip r:embed="rId6"/>
+          <a:stretch>
+            <a:fillRect/>
+          </a:stretch>
+        </p:blipFill>
+        <p:spPr>
+          <a:xfrm>
+            <a:off x="1362942" y="1187729"/>
+            <a:ext cx="8243316" cy="4327741"/>
+          </a:xfrm>
+          <a:prstGeom prst="rect">
+            <a:avLst/>
+          </a:prstGeom>
+        </p:spPr>
+      </p:pic>
+    </p:spTree>
+    <p:custDataLst>
+      <p:tags r:id="rId2"/>
+    </p:custDataLst>
+    <p:extLst>
+      <p:ext uri="{BB962C8B-B14F-4D97-AF65-F5344CB8AC3E}">
+        <p14:creationId xmlns:p14="http://schemas.microsoft.com/office/powerpoint/2010/main" val="2684121149"/>
+      </p:ext>
+    </p:extLst>
+  </p:cSld>
+  <p:clrMapOvr>
+    <a:masterClrMapping/>
+  </p:clrMapOvr>
+</p:sld>
+</file>
+
+<file path=ppt/slides/slide11.xml><?xml version="1.0" encoding="utf-8"?>
+<p:sld xmlns:a="http://schemas.openxmlformats.org/drawingml/2006/main" xmlns:r="http://schemas.openxmlformats.org/officeDocument/2006/relationships" xmlns:p="http://schemas.openxmlformats.org/presentationml/2006/main">
+  <p:cSld>
+    <p:spTree>
+      <p:nvGrpSpPr>
+        <p:cNvPr id="1" name=""/>
+        <p:cNvGrpSpPr/>
+        <p:nvPr/>
+      </p:nvGrpSpPr>
+      <p:grpSpPr>
+        <a:xfrm>
+          <a:off x="0" y="0"/>
+          <a:ext cx="0" cy="0"/>
+          <a:chOff x="0" y="0"/>
+          <a:chExt cx="0" cy="0"/>
+        </a:xfrm>
+      </p:grpSpPr>
+      <p:sp>
+        <p:nvSpPr>
+          <p:cNvPr id="6" name="Titel 5"/>
+          <p:cNvSpPr>
+            <a:spLocks noGrp="1"/>
+          </p:cNvSpPr>
+          <p:nvPr>
+            <p:ph type="title"/>
+          </p:nvPr>
+        </p:nvSpPr>
+        <p:spPr>
+          <a:xfrm>
+            <a:off x="205200" y="648000"/>
+            <a:ext cx="10558800" cy="388800"/>
+          </a:xfrm>
+        </p:spPr>
+        <p:txBody>
+          <a:bodyPr lIns="0" tIns="0" rIns="0" bIns="0"/>
+          <a:lstStyle/>
+          <a:p>
+            <a:r>
+              <a:rPr lang="de-DE" dirty="0"/>
+              <a:t>Next Steps</a:t>
+            </a:r>
+          </a:p>
+        </p:txBody>
+      </p:sp>
+      <p:sp>
+        <p:nvSpPr>
+          <p:cNvPr id="3" name="chapter_conv"/>
+          <p:cNvSpPr>
+            <a:spLocks noGrp="1"/>
+          </p:cNvSpPr>
+          <p:nvPr>
+            <p:ph type="body" sz="quarter" idx="15"/>
+          </p:nvPr>
+        </p:nvSpPr>
+        <p:spPr>
+          <a:xfrm>
+            <a:off x="205200" y="259200"/>
+            <a:ext cx="10558800" cy="388800"/>
+          </a:xfrm>
+        </p:spPr>
+        <p:txBody>
+          <a:bodyPr vert="horz" lIns="0" tIns="0" rIns="0" bIns="0" rtlCol="0">
+            <a:noAutofit/>
+          </a:bodyPr>
+          <a:lstStyle/>
+          <a:p>
+            <a:r>
+              <a:rPr lang="de-DE" dirty="0"/>
+              <a:t>Roadmap</a:t>
+            </a:r>
+          </a:p>
+        </p:txBody>
+      </p:sp>
+      <p:graphicFrame>
+        <p:nvGraphicFramePr>
+          <p:cNvPr id="2" name="Table 1"/>
+          <p:cNvGraphicFramePr>
+            <a:graphicFrameLocks noGrp="1"/>
+          </p:cNvGraphicFramePr>
+          <p:nvPr>
+            <p:extLst>
+              <p:ext uri="{D42A27DB-BD31-4B8C-83A1-F6EECF244321}">
+                <p14:modId xmlns:p14="http://schemas.microsoft.com/office/powerpoint/2010/main" val="2428119383"/>
+              </p:ext>
+            </p:extLst>
+          </p:nvPr>
+        </p:nvGraphicFramePr>
+        <p:xfrm>
+          <a:off x="205225" y="3186598"/>
+          <a:ext cx="10558772" cy="370840"/>
+        </p:xfrm>
+        <a:graphic>
+          <a:graphicData uri="http://schemas.openxmlformats.org/drawingml/2006/table">
+            <a:tbl>
+              <a:tblPr firstRow="1" bandRow="1">
+                <a:tableStyleId>{5C22544A-7EE6-4342-B048-85BDC9FD1C3A}</a:tableStyleId>
+              </a:tblPr>
+              <a:tblGrid>
+                <a:gridCol w="1508396">
+                  <a:extLst>
+                    <a:ext uri="{9D8B030D-6E8A-4147-A177-3AD203B41FA5}">
+                      <a16:colId xmlns:a16="http://schemas.microsoft.com/office/drawing/2014/main" val="2878533617"/>
+                    </a:ext>
+                  </a:extLst>
+                </a:gridCol>
+                <a:gridCol w="1508396">
+                  <a:extLst>
+                    <a:ext uri="{9D8B030D-6E8A-4147-A177-3AD203B41FA5}">
+                      <a16:colId xmlns:a16="http://schemas.microsoft.com/office/drawing/2014/main" val="2703166370"/>
+                    </a:ext>
+                  </a:extLst>
+                </a:gridCol>
+                <a:gridCol w="1508396">
+                  <a:extLst>
+                    <a:ext uri="{9D8B030D-6E8A-4147-A177-3AD203B41FA5}">
+                      <a16:colId xmlns:a16="http://schemas.microsoft.com/office/drawing/2014/main" val="769284438"/>
+                    </a:ext>
+                  </a:extLst>
+                </a:gridCol>
+                <a:gridCol w="1508396">
+                  <a:extLst>
+                    <a:ext uri="{9D8B030D-6E8A-4147-A177-3AD203B41FA5}">
+                      <a16:colId xmlns:a16="http://schemas.microsoft.com/office/drawing/2014/main" val="1270405358"/>
+                    </a:ext>
+                  </a:extLst>
+                </a:gridCol>
+                <a:gridCol w="1508396">
+                  <a:extLst>
+                    <a:ext uri="{9D8B030D-6E8A-4147-A177-3AD203B41FA5}">
+                      <a16:colId xmlns:a16="http://schemas.microsoft.com/office/drawing/2014/main" val="3272191252"/>
+                    </a:ext>
+                  </a:extLst>
+                </a:gridCol>
+                <a:gridCol w="1508396">
+                  <a:extLst>
+                    <a:ext uri="{9D8B030D-6E8A-4147-A177-3AD203B41FA5}">
+                      <a16:colId xmlns:a16="http://schemas.microsoft.com/office/drawing/2014/main" val="3830149901"/>
+                    </a:ext>
+                  </a:extLst>
+                </a:gridCol>
+                <a:gridCol w="1508396">
+                  <a:extLst>
+                    <a:ext uri="{9D8B030D-6E8A-4147-A177-3AD203B41FA5}">
+                      <a16:colId xmlns:a16="http://schemas.microsoft.com/office/drawing/2014/main" val="3366881802"/>
+                    </a:ext>
+                  </a:extLst>
+                </a:gridCol>
+              </a:tblGrid>
+              <a:tr h="370840">
+                <a:tc>
+                  <a:txBody>
+                    <a:bodyPr/>
+                    <a:lstStyle/>
+                    <a:p>
+                      <a:endParaRPr lang="de-DE" b="1" dirty="0">
+                        <a:latin typeface="+mj-lt"/>
+                      </a:endParaRPr>
+                    </a:p>
+                  </a:txBody>
+                  <a:tcPr marL="216000">
+                    <a:lnL w="12700" cmpd="sng">
+                      <a:noFill/>
+                    </a:lnL>
+                    <a:lnR w="12700" cap="flat" cmpd="sng" algn="ctr">
+                      <a:noFill/>
+                      <a:prstDash val="solid"/>
+                      <a:round/>
+                      <a:headEnd type="none" w="med" len="med"/>
+                      <a:tailEnd type="none" w="med" len="med"/>
+                    </a:lnR>
+                    <a:lnT w="12700" cmpd="sng">
+                      <a:noFill/>
+                    </a:lnT>
+                    <a:lnB w="38100" cmpd="sng">
+                      <a:noFill/>
+                    </a:lnB>
+                    <a:lnTlToBr w="12700" cmpd="sng">
+                      <a:noFill/>
+                      <a:prstDash val="solid"/>
+                    </a:lnTlToBr>
+                    <a:lnBlToTr w="12700" cmpd="sng">
+                      <a:noFill/>
+                      <a:prstDash val="solid"/>
+                    </a:lnBlToTr>
+                    <a:solidFill>
+                      <a:srgbClr val="EFF1F2"/>
+                    </a:solidFill>
+                  </a:tcPr>
+                </a:tc>
+                <a:tc>
+                  <a:txBody>
+                    <a:bodyPr/>
+                    <a:lstStyle/>
+                    <a:p>
+                      <a:r>
+                        <a:rPr lang="de-DE" b="1" dirty="0">
+                          <a:solidFill>
+                            <a:schemeClr val="tx1"/>
+                          </a:solidFill>
+                          <a:latin typeface="+mj-lt"/>
+                        </a:rPr>
+                        <a:t>APR</a:t>
+                      </a:r>
+                    </a:p>
+                  </a:txBody>
+                  <a:tcPr marL="216000">
+                    <a:lnL w="12700" cap="flat" cmpd="sng" algn="ctr">
+                      <a:noFill/>
+                      <a:prstDash val="solid"/>
+                      <a:round/>
+                      <a:headEnd type="none" w="med" len="med"/>
+                      <a:tailEnd type="none" w="med" len="med"/>
+                    </a:lnL>
+                    <a:lnR w="12700" cap="flat" cmpd="sng" algn="ctr">
+                      <a:noFill/>
+                      <a:prstDash val="solid"/>
+                      <a:round/>
+                      <a:headEnd type="none" w="med" len="med"/>
+                      <a:tailEnd type="none" w="med" len="med"/>
+                    </a:lnR>
+                    <a:lnT w="12700" cmpd="sng">
+                      <a:noFill/>
+                    </a:lnT>
+                    <a:lnB w="38100" cmpd="sng">
+                      <a:noFill/>
+                    </a:lnB>
+                    <a:lnTlToBr w="12700" cmpd="sng">
+                      <a:noFill/>
+                      <a:prstDash val="solid"/>
+                    </a:lnTlToBr>
+                    <a:lnBlToTr w="12700" cmpd="sng">
+                      <a:noFill/>
+                      <a:prstDash val="solid"/>
+                    </a:lnBlToTr>
+                    <a:solidFill>
+                      <a:srgbClr val="EFF1F2"/>
+                    </a:solidFill>
+                  </a:tcPr>
+                </a:tc>
+                <a:tc>
+                  <a:txBody>
+                    <a:bodyPr/>
+                    <a:lstStyle/>
+                    <a:p>
+                      <a:pPr marL="0" marR="0" lvl="0" indent="0" algn="l" defTabSz="914333" rtl="0" eaLnBrk="1" fontAlgn="auto" latinLnBrk="0" hangingPunct="1">
+                        <a:lnSpc>
+                          <a:spcPct val="100000"/>
+                        </a:lnSpc>
+                        <a:spcBef>
+                          <a:spcPts val="0"/>
+                        </a:spcBef>
+                        <a:spcAft>
+                          <a:spcPts val="0"/>
+                        </a:spcAft>
+                        <a:buClrTx/>
+                        <a:buSzTx/>
+                        <a:buFontTx/>
+                        <a:buNone/>
+                        <a:tabLst/>
+                        <a:defRPr/>
+                      </a:pPr>
+                      <a:r>
+                        <a:rPr lang="de-DE" b="1" dirty="0">
+                          <a:solidFill>
+                            <a:schemeClr val="tx1"/>
+                          </a:solidFill>
+                          <a:latin typeface="+mj-lt"/>
+                        </a:rPr>
+                        <a:t>MAY</a:t>
+                      </a:r>
+                    </a:p>
+                  </a:txBody>
+                  <a:tcPr marL="216000">
+                    <a:lnL w="12700" cap="flat" cmpd="sng" algn="ctr">
+                      <a:noFill/>
+                      <a:prstDash val="solid"/>
+                      <a:round/>
+                      <a:headEnd type="none" w="med" len="med"/>
+                      <a:tailEnd type="none" w="med" len="med"/>
+                    </a:lnL>
+                    <a:lnR w="12700" cap="flat" cmpd="sng" algn="ctr">
+                      <a:noFill/>
+                      <a:prstDash val="solid"/>
+                      <a:round/>
+                      <a:headEnd type="none" w="med" len="med"/>
+                      <a:tailEnd type="none" w="med" len="med"/>
+                    </a:lnR>
+                    <a:lnT w="12700" cmpd="sng">
+                      <a:noFill/>
+                    </a:lnT>
+                    <a:lnB w="38100" cmpd="sng">
+                      <a:noFill/>
+                    </a:lnB>
+                    <a:lnTlToBr w="12700" cmpd="sng">
+                      <a:noFill/>
+                      <a:prstDash val="solid"/>
+                    </a:lnTlToBr>
+                    <a:lnBlToTr w="12700" cmpd="sng">
+                      <a:noFill/>
+                      <a:prstDash val="solid"/>
+                    </a:lnBlToTr>
+                    <a:solidFill>
+                      <a:srgbClr val="EFF1F2"/>
+                    </a:solidFill>
+                  </a:tcPr>
+                </a:tc>
+                <a:tc>
+                  <a:txBody>
+                    <a:bodyPr/>
+                    <a:lstStyle/>
+                    <a:p>
+                      <a:pPr marL="0" marR="0" lvl="0" indent="0" algn="l" defTabSz="914333" rtl="0" eaLnBrk="1" fontAlgn="auto" latinLnBrk="0" hangingPunct="1">
+                        <a:lnSpc>
+                          <a:spcPct val="100000"/>
+                        </a:lnSpc>
+                        <a:spcBef>
+                          <a:spcPts val="0"/>
+                        </a:spcBef>
+                        <a:spcAft>
+                          <a:spcPts val="0"/>
+                        </a:spcAft>
+                        <a:buClrTx/>
+                        <a:buSzTx/>
+                        <a:buFontTx/>
+                        <a:buNone/>
+                        <a:tabLst/>
+                        <a:defRPr/>
+                      </a:pPr>
+                      <a:r>
+                        <a:rPr lang="de-DE" b="1" dirty="0">
+                          <a:solidFill>
+                            <a:schemeClr val="tx1"/>
+                          </a:solidFill>
+                          <a:latin typeface="+mj-lt"/>
+                        </a:rPr>
+                        <a:t>JUN</a:t>
+                      </a:r>
+                    </a:p>
+                  </a:txBody>
+                  <a:tcPr marL="216000">
+                    <a:lnL w="12700" cap="flat" cmpd="sng" algn="ctr">
+                      <a:noFill/>
+                      <a:prstDash val="solid"/>
+                      <a:round/>
+                      <a:headEnd type="none" w="med" len="med"/>
+                      <a:tailEnd type="none" w="med" len="med"/>
+                    </a:lnL>
+                    <a:lnR w="12700" cap="flat" cmpd="sng" algn="ctr">
+                      <a:noFill/>
+                      <a:prstDash val="solid"/>
+                      <a:round/>
+                      <a:headEnd type="none" w="med" len="med"/>
+                      <a:tailEnd type="none" w="med" len="med"/>
+                    </a:lnR>
+                    <a:lnT w="12700" cmpd="sng">
+                      <a:noFill/>
+                    </a:lnT>
+                    <a:lnB w="38100" cmpd="sng">
+                      <a:noFill/>
+                    </a:lnB>
+                    <a:lnTlToBr w="12700" cmpd="sng">
+                      <a:noFill/>
+                      <a:prstDash val="solid"/>
+                    </a:lnTlToBr>
+                    <a:lnBlToTr w="12700" cmpd="sng">
+                      <a:noFill/>
+                      <a:prstDash val="solid"/>
+                    </a:lnBlToTr>
+                    <a:solidFill>
+                      <a:srgbClr val="EFF1F2"/>
+                    </a:solidFill>
+                  </a:tcPr>
+                </a:tc>
+                <a:tc>
+                  <a:txBody>
+                    <a:bodyPr/>
+                    <a:lstStyle/>
+                    <a:p>
+                      <a:pPr marL="0" marR="0" lvl="0" indent="0" algn="l" defTabSz="914333" rtl="0" eaLnBrk="1" fontAlgn="auto" latinLnBrk="0" hangingPunct="1">
+                        <a:lnSpc>
+                          <a:spcPct val="100000"/>
+                        </a:lnSpc>
+                        <a:spcBef>
+                          <a:spcPts val="0"/>
+                        </a:spcBef>
+                        <a:spcAft>
+                          <a:spcPts val="0"/>
+                        </a:spcAft>
+                        <a:buClrTx/>
+                        <a:buSzTx/>
+                        <a:buFontTx/>
+                        <a:buNone/>
+                        <a:tabLst/>
+                        <a:defRPr/>
+                      </a:pPr>
+                      <a:r>
+                        <a:rPr lang="de-DE" b="1" dirty="0">
+                          <a:solidFill>
+                            <a:schemeClr val="tx1"/>
+                          </a:solidFill>
+                          <a:latin typeface="+mj-lt"/>
+                        </a:rPr>
+                        <a:t>JUL</a:t>
+                      </a:r>
+                    </a:p>
+                  </a:txBody>
+                  <a:tcPr marL="216000">
+                    <a:lnL w="12700" cap="flat" cmpd="sng" algn="ctr">
+                      <a:noFill/>
+                      <a:prstDash val="solid"/>
+                      <a:round/>
+                      <a:headEnd type="none" w="med" len="med"/>
+                      <a:tailEnd type="none" w="med" len="med"/>
+                    </a:lnL>
+                    <a:lnR w="12700" cap="flat" cmpd="sng" algn="ctr">
+                      <a:noFill/>
+                      <a:prstDash val="solid"/>
+                      <a:round/>
+                      <a:headEnd type="none" w="med" len="med"/>
+                      <a:tailEnd type="none" w="med" len="med"/>
+                    </a:lnR>
+                    <a:lnT w="12700" cmpd="sng">
+                      <a:noFill/>
+                    </a:lnT>
+                    <a:lnB w="38100" cmpd="sng">
+                      <a:noFill/>
+                    </a:lnB>
+                    <a:lnTlToBr w="12700" cmpd="sng">
+                      <a:noFill/>
+                      <a:prstDash val="solid"/>
+                    </a:lnTlToBr>
+                    <a:lnBlToTr w="12700" cmpd="sng">
+                      <a:noFill/>
+                      <a:prstDash val="solid"/>
+                    </a:lnBlToTr>
+                    <a:solidFill>
+                      <a:srgbClr val="EFF1F2"/>
+                    </a:solidFill>
+                  </a:tcPr>
+                </a:tc>
+                <a:tc>
+                  <a:txBody>
+                    <a:bodyPr/>
+                    <a:lstStyle/>
+                    <a:p>
+                      <a:pPr marL="0" marR="0" lvl="0" indent="0" algn="l" defTabSz="914333" rtl="0" eaLnBrk="1" fontAlgn="auto" latinLnBrk="0" hangingPunct="1">
+                        <a:lnSpc>
+                          <a:spcPct val="100000"/>
+                        </a:lnSpc>
+                        <a:spcBef>
+                          <a:spcPts val="0"/>
+                        </a:spcBef>
+                        <a:spcAft>
+                          <a:spcPts val="0"/>
+                        </a:spcAft>
+                        <a:buClrTx/>
+                        <a:buSzTx/>
+                        <a:buFontTx/>
+                        <a:buNone/>
+                        <a:tabLst/>
+                        <a:defRPr/>
+                      </a:pPr>
+                      <a:r>
+                        <a:rPr lang="de-DE" b="1" dirty="0">
+                          <a:solidFill>
+                            <a:schemeClr val="bg1"/>
+                          </a:solidFill>
+                          <a:latin typeface="+mj-lt"/>
+                        </a:rPr>
+                        <a:t>AUG</a:t>
+                      </a:r>
+                    </a:p>
+                  </a:txBody>
+                  <a:tcPr marL="216000">
+                    <a:lnL w="12700" cap="flat" cmpd="sng" algn="ctr">
+                      <a:noFill/>
+                      <a:prstDash val="solid"/>
+                      <a:round/>
+                      <a:headEnd type="none" w="med" len="med"/>
+                      <a:tailEnd type="none" w="med" len="med"/>
+                    </a:lnL>
+                    <a:lnR w="12700" cap="flat" cmpd="sng" algn="ctr">
+                      <a:noFill/>
+                      <a:prstDash val="solid"/>
+                      <a:round/>
+                      <a:headEnd type="none" w="med" len="med"/>
+                      <a:tailEnd type="none" w="med" len="med"/>
+                    </a:lnR>
+                    <a:lnT w="12700" cmpd="sng">
+                      <a:noFill/>
+                    </a:lnT>
+                    <a:lnB w="38100" cmpd="sng">
+                      <a:noFill/>
+                    </a:lnB>
+                    <a:lnTlToBr w="12700" cmpd="sng">
+                      <a:noFill/>
+                      <a:prstDash val="solid"/>
+                    </a:lnTlToBr>
+                    <a:lnBlToTr w="12700" cmpd="sng">
+                      <a:noFill/>
+                      <a:prstDash val="solid"/>
+                    </a:lnBlToTr>
+                    <a:solidFill>
+                      <a:schemeClr val="accent1"/>
+                    </a:solidFill>
+                  </a:tcPr>
+                </a:tc>
+                <a:tc>
+                  <a:txBody>
+                    <a:bodyPr/>
+                    <a:lstStyle/>
+                    <a:p>
+                      <a:r>
+                        <a:rPr lang="de-DE" b="1" dirty="0">
+                          <a:solidFill>
+                            <a:schemeClr val="tx1"/>
+                          </a:solidFill>
+                          <a:latin typeface="+mj-lt"/>
+                        </a:rPr>
+                        <a:t>Next Steps</a:t>
+                      </a:r>
+                    </a:p>
+                  </a:txBody>
+                  <a:tcPr marL="216000">
+                    <a:lnL w="12700" cap="flat" cmpd="sng" algn="ctr">
+                      <a:noFill/>
+                      <a:prstDash val="solid"/>
+                      <a:round/>
+                      <a:headEnd type="none" w="med" len="med"/>
+                      <a:tailEnd type="none" w="med" len="med"/>
+                    </a:lnL>
+                    <a:lnR w="12700" cap="flat" cmpd="sng" algn="ctr">
+                      <a:noFill/>
+                      <a:prstDash val="solid"/>
+                      <a:round/>
+                      <a:headEnd type="none" w="med" len="med"/>
+                      <a:tailEnd type="none" w="med" len="med"/>
+                    </a:lnR>
+                    <a:lnT w="12700" cmpd="sng">
+                      <a:noFill/>
+                    </a:lnT>
+                    <a:lnB w="38100" cmpd="sng">
+                      <a:noFill/>
+                    </a:lnB>
+                    <a:lnTlToBr w="12700" cmpd="sng">
+                      <a:noFill/>
+                      <a:prstDash val="solid"/>
+                    </a:lnTlToBr>
+                    <a:lnBlToTr w="12700" cmpd="sng">
+                      <a:noFill/>
+                      <a:prstDash val="solid"/>
+                    </a:lnBlToTr>
+                    <a:solidFill>
+                      <a:srgbClr val="F0F0F0"/>
+                    </a:solidFill>
+                  </a:tcPr>
+                </a:tc>
+                <a:extLst>
+                  <a:ext uri="{0D108BD9-81ED-4DB2-BD59-A6C34878D82A}">
+                    <a16:rowId xmlns:a16="http://schemas.microsoft.com/office/drawing/2014/main" val="1919386277"/>
+                  </a:ext>
+                </a:extLst>
+              </a:tr>
+            </a:tbl>
+          </a:graphicData>
+        </a:graphic>
+      </p:graphicFrame>
+      <p:sp>
+        <p:nvSpPr>
+          <p:cNvPr id="8" name="TextBox 7"/>
+          <p:cNvSpPr txBox="1"/>
+          <p:nvPr/>
+        </p:nvSpPr>
+        <p:spPr>
+          <a:xfrm>
+            <a:off x="8826015" y="2779978"/>
+            <a:ext cx="768755" cy="256032"/>
+          </a:xfrm>
+          <a:prstGeom prst="rect">
+            <a:avLst/>
+          </a:prstGeom>
+          <a:noFill/>
+        </p:spPr>
+        <p:txBody>
+          <a:bodyPr wrap="square" lIns="0" tIns="0" rIns="0" bIns="0" rtlCol="0">
+            <a:noAutofit/>
+          </a:bodyPr>
+          <a:lstStyle/>
+          <a:p>
+            <a:pPr marR="0" defTabSz="914400" eaLnBrk="1" fontAlgn="auto" latinLnBrk="0" hangingPunct="1">
+              <a:lnSpc>
+                <a:spcPts val="2300"/>
+              </a:lnSpc>
+              <a:spcBef>
+                <a:spcPts val="500"/>
+              </a:spcBef>
+              <a:spcAft>
+                <a:spcPts val="0"/>
+              </a:spcAft>
+              <a:buClrTx/>
+              <a:buSzTx/>
+              <a:buFontTx/>
+              <a:buNone/>
+              <a:tabLst/>
+            </a:pPr>
+            <a:endParaRPr kumimoji="0" lang="de-DE" sz="1400" b="1" i="0" u="none" strike="noStrike" kern="0" cap="none" spc="0" normalizeH="0" baseline="0" noProof="0" dirty="0">
+              <a:solidFill>
+                <a:schemeClr val="accent2"/>
+              </a:solidFill>
+              <a:effectLst/>
+              <a:uLnTx/>
+              <a:uFillTx/>
+              <a:latin typeface="+mj-lt"/>
+            </a:endParaRPr>
+          </a:p>
+        </p:txBody>
+      </p:sp>
+      <p:graphicFrame>
+        <p:nvGraphicFramePr>
+          <p:cNvPr id="18" name="Inhaltsplatzhalter 5"/>
+          <p:cNvGraphicFramePr>
+            <a:graphicFrameLocks/>
+          </p:cNvGraphicFramePr>
+          <p:nvPr>
+            <p:extLst>
+              <p:ext uri="{D42A27DB-BD31-4B8C-83A1-F6EECF244321}">
+                <p14:modId xmlns:p14="http://schemas.microsoft.com/office/powerpoint/2010/main" val="3786205072"/>
+              </p:ext>
+            </p:extLst>
+          </p:nvPr>
+        </p:nvGraphicFramePr>
+        <p:xfrm>
+          <a:off x="1392040" y="1491595"/>
+          <a:ext cx="1935477" cy="1174779"/>
+        </p:xfrm>
+        <a:graphic>
+          <a:graphicData uri="http://schemas.openxmlformats.org/drawingml/2006/table">
+            <a:tbl>
+              <a:tblPr firstRow="1" bandRow="1">
+                <a:tableStyleId>{5C22544A-7EE6-4342-B048-85BDC9FD1C3A}</a:tableStyleId>
+              </a:tblPr>
+              <a:tblGrid>
+                <a:gridCol w="1935477">
+                  <a:extLst>
+                    <a:ext uri="{9D8B030D-6E8A-4147-A177-3AD203B41FA5}">
+                      <a16:colId xmlns:a16="http://schemas.microsoft.com/office/drawing/2014/main" val="222448469"/>
+                    </a:ext>
+                  </a:extLst>
+                </a:gridCol>
+              </a:tblGrid>
+              <a:tr h="192221">
+                <a:tc>
+                  <a:txBody>
+                    <a:bodyPr/>
+                    <a:lstStyle/>
+                    <a:p>
+                      <a:pPr marL="0" marR="0" lvl="0" indent="0" algn="l" defTabSz="914400" rtl="0" eaLnBrk="1" fontAlgn="auto" latinLnBrk="0" hangingPunct="1">
+                        <a:lnSpc>
+                          <a:spcPct val="100000"/>
+                        </a:lnSpc>
+                        <a:spcBef>
+                          <a:spcPts val="500"/>
+                        </a:spcBef>
+                        <a:spcAft>
+                          <a:spcPts val="0"/>
+                        </a:spcAft>
+                        <a:buClrTx/>
+                        <a:buSzTx/>
+                        <a:buFontTx/>
+                        <a:buNone/>
+                        <a:tabLst/>
+                        <a:defRPr/>
+                      </a:pPr>
+                      <a:r>
+                        <a:rPr kumimoji="0" lang="de-DE" sz="1600" b="1" i="0" u="none" strike="noStrike" kern="1200" cap="none" spc="0" normalizeH="0" baseline="0" noProof="0" dirty="0">
+                          <a:ln>
+                            <a:noFill/>
+                          </a:ln>
+                          <a:solidFill>
+                            <a:schemeClr val="accent1"/>
+                          </a:solidFill>
+                          <a:effectLst/>
+                          <a:uLnTx/>
+                          <a:uFillTx/>
+                          <a:latin typeface="+mj-lt"/>
+                          <a:ea typeface="+mn-ea"/>
+                          <a:cs typeface="+mn-cs"/>
+                        </a:rPr>
+                        <a:t>Planning</a:t>
+                      </a:r>
+                      <a:r>
+                        <a:rPr kumimoji="0" lang="de-DE" sz="1600" b="1" i="0" u="none" strike="noStrike" kern="1200" cap="none" spc="0" normalizeH="0" baseline="0" noProof="0" dirty="0">
+                          <a:ln>
+                            <a:noFill/>
+                          </a:ln>
+                          <a:solidFill>
+                            <a:srgbClr val="00884A"/>
+                          </a:solidFill>
+                          <a:effectLst/>
+                          <a:uLnTx/>
+                          <a:uFillTx/>
+                          <a:latin typeface="+mj-lt"/>
+                          <a:ea typeface="+mn-ea"/>
+                          <a:cs typeface="+mn-cs"/>
+                        </a:rPr>
+                        <a:t> </a:t>
+                      </a:r>
+                      <a:endParaRPr kumimoji="0" lang="de-DE" sz="1600" b="1" i="0" u="none" strike="noStrike" kern="0" cap="none" spc="0" normalizeH="0" baseline="0" noProof="0" dirty="0">
+                        <a:ln>
+                          <a:noFill/>
+                        </a:ln>
+                        <a:solidFill>
+                          <a:srgbClr val="00884A"/>
+                        </a:solidFill>
+                        <a:effectLst/>
+                        <a:uLnTx/>
+                        <a:uFillTx/>
+                        <a:latin typeface="+mj-lt"/>
+                        <a:ea typeface="+mn-ea"/>
+                        <a:cs typeface="+mn-cs"/>
+                      </a:endParaRPr>
+                    </a:p>
+                  </a:txBody>
+                  <a:tcPr marL="0" marR="180000" marT="0" marB="36000">
+                    <a:lnL w="12700" cmpd="sng">
+                      <a:noFill/>
+                    </a:lnL>
+                    <a:lnR w="12700" cap="flat" cmpd="sng" algn="ctr">
+                      <a:noFill/>
+                      <a:prstDash val="solid"/>
+                      <a:round/>
+                      <a:headEnd type="none" w="med" len="med"/>
+                      <a:tailEnd type="none" w="med" len="med"/>
+                    </a:lnR>
+                    <a:lnT w="38100" cmpd="sng">
+                      <a:noFill/>
+                    </a:lnT>
+                    <a:lnB w="12700" cmpd="sng">
+                      <a:noFill/>
+                    </a:lnB>
+                    <a:lnTlToBr w="12700" cmpd="sng">
+                      <a:noFill/>
+                      <a:prstDash val="solid"/>
+                    </a:lnTlToBr>
+                    <a:lnBlToTr w="12700" cmpd="sng">
+                      <a:noFill/>
+                      <a:prstDash val="solid"/>
+                    </a:lnBlToTr>
+                    <a:noFill/>
+                  </a:tcPr>
+                </a:tc>
+                <a:extLst>
+                  <a:ext uri="{0D108BD9-81ED-4DB2-BD59-A6C34878D82A}">
+                    <a16:rowId xmlns:a16="http://schemas.microsoft.com/office/drawing/2014/main" val="2502020139"/>
+                  </a:ext>
+                </a:extLst>
+              </a:tr>
+              <a:tr h="894939">
+                <a:tc>
+                  <a:txBody>
+                    <a:bodyPr/>
+                    <a:lstStyle/>
+                    <a:p>
+                      <a:r>
+                        <a:rPr lang="en-US" sz="1400" dirty="0"/>
+                        <a:t>Defines project scope, requirements, objectives, and execution plan.</a:t>
+                      </a:r>
+                      <a:endParaRPr lang="en-US" sz="1400" b="0" dirty="0"/>
+                    </a:p>
+                  </a:txBody>
+                  <a:tcPr marL="0" marR="180000" marT="0" marB="0">
+                    <a:lnL w="12700" cmpd="sng">
+                      <a:noFill/>
+                    </a:lnL>
+                    <a:lnR w="12700" cap="flat" cmpd="sng" algn="ctr">
+                      <a:noFill/>
+                      <a:prstDash val="solid"/>
+                      <a:round/>
+                      <a:headEnd type="none" w="med" len="med"/>
+                      <a:tailEnd type="none" w="med" len="med"/>
+                    </a:lnR>
+                    <a:lnT w="38100" cmpd="sng">
+                      <a:noFill/>
+                    </a:lnT>
+                    <a:lnB w="12700" cmpd="sng">
+                      <a:noFill/>
+                    </a:lnB>
+                    <a:lnTlToBr w="12700" cmpd="sng">
+                      <a:noFill/>
+                      <a:prstDash val="solid"/>
+                    </a:lnTlToBr>
+                    <a:lnBlToTr w="12700" cmpd="sng">
+                      <a:noFill/>
+                      <a:prstDash val="solid"/>
+                    </a:lnBlToTr>
+                    <a:noFill/>
+                  </a:tcPr>
+                </a:tc>
+                <a:extLst>
+                  <a:ext uri="{0D108BD9-81ED-4DB2-BD59-A6C34878D82A}">
+                    <a16:rowId xmlns:a16="http://schemas.microsoft.com/office/drawing/2014/main" val="1744734559"/>
+                  </a:ext>
+                </a:extLst>
+              </a:tr>
+            </a:tbl>
+          </a:graphicData>
+        </a:graphic>
+      </p:graphicFrame>
+      <p:graphicFrame>
+        <p:nvGraphicFramePr>
+          <p:cNvPr id="22" name="Inhaltsplatzhalter 5_"/>
+          <p:cNvGraphicFramePr>
+            <a:graphicFrameLocks/>
+          </p:cNvGraphicFramePr>
+          <p:nvPr>
+            <p:extLst>
+              <p:ext uri="{D42A27DB-BD31-4B8C-83A1-F6EECF244321}">
+                <p14:modId xmlns:p14="http://schemas.microsoft.com/office/powerpoint/2010/main" val="2396497140"/>
+              </p:ext>
+            </p:extLst>
+          </p:nvPr>
+        </p:nvGraphicFramePr>
+        <p:xfrm>
+          <a:off x="2879551" y="4333324"/>
+          <a:ext cx="1935477" cy="1174779"/>
+        </p:xfrm>
+        <a:graphic>
+          <a:graphicData uri="http://schemas.openxmlformats.org/drawingml/2006/table">
+            <a:tbl>
+              <a:tblPr firstRow="1" bandRow="1">
+                <a:tableStyleId>{5C22544A-7EE6-4342-B048-85BDC9FD1C3A}</a:tableStyleId>
+              </a:tblPr>
+              <a:tblGrid>
+                <a:gridCol w="1935477">
+                  <a:extLst>
+                    <a:ext uri="{9D8B030D-6E8A-4147-A177-3AD203B41FA5}">
+                      <a16:colId xmlns:a16="http://schemas.microsoft.com/office/drawing/2014/main" val="222448469"/>
+                    </a:ext>
+                  </a:extLst>
+                </a:gridCol>
+              </a:tblGrid>
+              <a:tr h="192221">
+                <a:tc>
+                  <a:txBody>
+                    <a:bodyPr/>
+                    <a:lstStyle/>
+                    <a:p>
+                      <a:pPr marL="0" marR="0" lvl="0" indent="0" algn="l" defTabSz="914400" rtl="0" eaLnBrk="1" fontAlgn="auto" latinLnBrk="0" hangingPunct="1">
+                        <a:lnSpc>
+                          <a:spcPct val="100000"/>
+                        </a:lnSpc>
+                        <a:spcBef>
+                          <a:spcPts val="500"/>
+                        </a:spcBef>
+                        <a:spcAft>
+                          <a:spcPts val="0"/>
+                        </a:spcAft>
+                        <a:buClrTx/>
+                        <a:buSzTx/>
+                        <a:buFontTx/>
+                        <a:buNone/>
+                        <a:tabLst/>
+                        <a:defRPr/>
+                      </a:pPr>
+                      <a:r>
+                        <a:rPr kumimoji="0" lang="de-DE" sz="1600" b="1" i="0" u="none" strike="noStrike" kern="1200" cap="none" spc="0" normalizeH="0" baseline="0" noProof="0" dirty="0">
+                          <a:ln>
+                            <a:noFill/>
+                          </a:ln>
+                          <a:solidFill>
+                            <a:schemeClr val="accent1"/>
+                          </a:solidFill>
+                          <a:effectLst/>
+                          <a:uLnTx/>
+                          <a:uFillTx/>
+                          <a:latin typeface="+mj-lt"/>
+                          <a:ea typeface="+mn-ea"/>
+                          <a:cs typeface="+mn-cs"/>
+                        </a:rPr>
+                        <a:t>Coding</a:t>
+                      </a:r>
+                    </a:p>
+                  </a:txBody>
+                  <a:tcPr marL="0" marR="180000" marT="0" marB="36000">
+                    <a:lnL w="12700" cmpd="sng">
+                      <a:noFill/>
+                    </a:lnL>
+                    <a:lnR w="12700" cap="flat" cmpd="sng" algn="ctr">
+                      <a:noFill/>
+                      <a:prstDash val="solid"/>
+                      <a:round/>
+                      <a:headEnd type="none" w="med" len="med"/>
+                      <a:tailEnd type="none" w="med" len="med"/>
+                    </a:lnR>
+                    <a:lnT w="38100" cmpd="sng">
+                      <a:noFill/>
+                    </a:lnT>
+                    <a:lnB w="12700" cmpd="sng">
+                      <a:noFill/>
+                    </a:lnB>
+                    <a:lnTlToBr w="12700" cmpd="sng">
+                      <a:noFill/>
+                      <a:prstDash val="solid"/>
+                    </a:lnTlToBr>
+                    <a:lnBlToTr w="12700" cmpd="sng">
+                      <a:noFill/>
+                      <a:prstDash val="solid"/>
+                    </a:lnBlToTr>
+                    <a:noFill/>
+                  </a:tcPr>
+                </a:tc>
+                <a:extLst>
+                  <a:ext uri="{0D108BD9-81ED-4DB2-BD59-A6C34878D82A}">
+                    <a16:rowId xmlns:a16="http://schemas.microsoft.com/office/drawing/2014/main" val="2502020139"/>
+                  </a:ext>
+                </a:extLst>
+              </a:tr>
+              <a:tr h="894939">
+                <a:tc>
+                  <a:txBody>
+                    <a:bodyPr/>
+                    <a:lstStyle/>
+                    <a:p>
+                      <a:pPr marL="0" marR="0" lvl="0" indent="0" algn="l" defTabSz="914400" rtl="0" eaLnBrk="1" fontAlgn="auto" latinLnBrk="0" hangingPunct="1">
+                        <a:lnSpc>
+                          <a:spcPct val="100000"/>
+                        </a:lnSpc>
+                        <a:spcBef>
+                          <a:spcPts val="500"/>
+                        </a:spcBef>
+                        <a:spcAft>
+                          <a:spcPts val="0"/>
+                        </a:spcAft>
+                        <a:buClrTx/>
+                        <a:buSzTx/>
+                        <a:buFontTx/>
+                        <a:buNone/>
+                        <a:tabLst/>
+                        <a:defRPr/>
+                      </a:pPr>
+                      <a:r>
+                        <a:rPr lang="en-US" sz="1400" dirty="0"/>
+                        <a:t>Builds the solution based on defined requirements and design.</a:t>
+                      </a:r>
+                      <a:endParaRPr kumimoji="0" lang="de-DE" sz="1400" b="0" i="0" u="none" strike="noStrike" kern="0" cap="none" spc="0" normalizeH="0" baseline="0" noProof="0" dirty="0">
+                        <a:ln>
+                          <a:noFill/>
+                        </a:ln>
+                        <a:solidFill>
+                          <a:srgbClr val="000000"/>
+                        </a:solidFill>
+                        <a:effectLst/>
+                        <a:uLnTx/>
+                        <a:uFillTx/>
+                        <a:latin typeface="+mj-lt"/>
+                        <a:ea typeface="+mn-ea"/>
+                        <a:cs typeface="+mn-cs"/>
+                      </a:endParaRPr>
+                    </a:p>
+                  </a:txBody>
+                  <a:tcPr marL="0" marR="180000" marT="0" marB="0">
+                    <a:lnL w="12700" cmpd="sng">
+                      <a:noFill/>
+                    </a:lnL>
+                    <a:lnR w="12700" cap="flat" cmpd="sng" algn="ctr">
+                      <a:noFill/>
+                      <a:prstDash val="solid"/>
+                      <a:round/>
+                      <a:headEnd type="none" w="med" len="med"/>
+                      <a:tailEnd type="none" w="med" len="med"/>
+                    </a:lnR>
+                    <a:lnT w="38100" cmpd="sng">
+                      <a:noFill/>
+                    </a:lnT>
+                    <a:lnB w="12700" cmpd="sng">
+                      <a:noFill/>
+                    </a:lnB>
+                    <a:lnTlToBr w="12700" cmpd="sng">
+                      <a:noFill/>
+                      <a:prstDash val="solid"/>
+                    </a:lnTlToBr>
+                    <a:lnBlToTr w="12700" cmpd="sng">
+                      <a:noFill/>
+                      <a:prstDash val="solid"/>
+                    </a:lnBlToTr>
+                    <a:noFill/>
+                  </a:tcPr>
+                </a:tc>
+                <a:extLst>
+                  <a:ext uri="{0D108BD9-81ED-4DB2-BD59-A6C34878D82A}">
+                    <a16:rowId xmlns:a16="http://schemas.microsoft.com/office/drawing/2014/main" val="1744734559"/>
+                  </a:ext>
+                </a:extLst>
+              </a:tr>
+            </a:tbl>
+          </a:graphicData>
+        </a:graphic>
+      </p:graphicFrame>
+      <p:graphicFrame>
+        <p:nvGraphicFramePr>
+          <p:cNvPr id="29" name="Inhaltsplatzhalter 5__"/>
+          <p:cNvGraphicFramePr>
+            <a:graphicFrameLocks/>
+          </p:cNvGraphicFramePr>
+          <p:nvPr>
+            <p:extLst>
+              <p:ext uri="{D42A27DB-BD31-4B8C-83A1-F6EECF244321}">
+                <p14:modId xmlns:p14="http://schemas.microsoft.com/office/powerpoint/2010/main" val="300420590"/>
+              </p:ext>
+            </p:extLst>
+          </p:nvPr>
+        </p:nvGraphicFramePr>
+        <p:xfrm>
+          <a:off x="5872587" y="4333324"/>
+          <a:ext cx="1935477" cy="1174779"/>
+        </p:xfrm>
+        <a:graphic>
+          <a:graphicData uri="http://schemas.openxmlformats.org/drawingml/2006/table">
+            <a:tbl>
+              <a:tblPr firstRow="1" bandRow="1">
+                <a:tableStyleId>{5C22544A-7EE6-4342-B048-85BDC9FD1C3A}</a:tableStyleId>
+              </a:tblPr>
+              <a:tblGrid>
+                <a:gridCol w="1935477">
+                  <a:extLst>
+                    <a:ext uri="{9D8B030D-6E8A-4147-A177-3AD203B41FA5}">
+                      <a16:colId xmlns:a16="http://schemas.microsoft.com/office/drawing/2014/main" val="222448469"/>
+                    </a:ext>
+                  </a:extLst>
+                </a:gridCol>
+              </a:tblGrid>
+              <a:tr h="192221">
+                <a:tc>
+                  <a:txBody>
+                    <a:bodyPr/>
+                    <a:lstStyle/>
+                    <a:p>
+                      <a:pPr marL="0" marR="0" lvl="0" indent="0" algn="l" defTabSz="914400" rtl="0" eaLnBrk="1" fontAlgn="auto" latinLnBrk="0" hangingPunct="1">
+                        <a:lnSpc>
+                          <a:spcPct val="100000"/>
+                        </a:lnSpc>
+                        <a:spcBef>
+                          <a:spcPts val="500"/>
+                        </a:spcBef>
+                        <a:spcAft>
+                          <a:spcPts val="0"/>
+                        </a:spcAft>
+                        <a:buClrTx/>
+                        <a:buSzTx/>
+                        <a:buFontTx/>
+                        <a:buNone/>
+                        <a:tabLst/>
+                        <a:defRPr/>
+                      </a:pPr>
+                      <a:r>
+                        <a:rPr kumimoji="0" lang="de-DE" sz="1600" b="1" i="0" u="none" strike="noStrike" kern="1200" cap="none" spc="0" normalizeH="0" baseline="0" noProof="0" dirty="0">
+                          <a:ln>
+                            <a:noFill/>
+                          </a:ln>
+                          <a:solidFill>
+                            <a:schemeClr val="accent1"/>
+                          </a:solidFill>
+                          <a:effectLst/>
+                          <a:uLnTx/>
+                          <a:uFillTx/>
+                          <a:latin typeface="+mn-lt"/>
+                          <a:ea typeface="+mn-ea"/>
+                          <a:cs typeface="+mn-cs"/>
+                        </a:rPr>
+                        <a:t>Deployment</a:t>
+                      </a:r>
+                      <a:endParaRPr kumimoji="0" lang="de-DE" sz="1600" b="1" i="0" u="none" strike="noStrike" kern="0" cap="none" spc="0" normalizeH="0" baseline="0" noProof="0" dirty="0">
+                        <a:ln>
+                          <a:noFill/>
+                        </a:ln>
+                        <a:solidFill>
+                          <a:srgbClr val="000000"/>
+                        </a:solidFill>
+                        <a:effectLst/>
+                        <a:uLnTx/>
+                        <a:uFillTx/>
+                        <a:latin typeface="+mj-lt"/>
+                        <a:ea typeface="+mn-ea"/>
+                        <a:cs typeface="+mn-cs"/>
+                      </a:endParaRPr>
+                    </a:p>
+                  </a:txBody>
+                  <a:tcPr marL="0" marR="180000" marT="0" marB="36000">
+                    <a:lnL w="12700" cmpd="sng">
+                      <a:noFill/>
+                    </a:lnL>
+                    <a:lnR w="12700" cap="flat" cmpd="sng" algn="ctr">
+                      <a:noFill/>
+                      <a:prstDash val="solid"/>
+                      <a:round/>
+                      <a:headEnd type="none" w="med" len="med"/>
+                      <a:tailEnd type="none" w="med" len="med"/>
+                    </a:lnR>
+                    <a:lnT w="38100" cmpd="sng">
+                      <a:noFill/>
+                    </a:lnT>
+                    <a:lnB w="12700" cmpd="sng">
+                      <a:noFill/>
+                    </a:lnB>
+                    <a:lnTlToBr w="12700" cmpd="sng">
+                      <a:noFill/>
+                      <a:prstDash val="solid"/>
+                    </a:lnTlToBr>
+                    <a:lnBlToTr w="12700" cmpd="sng">
+                      <a:noFill/>
+                      <a:prstDash val="solid"/>
+                    </a:lnBlToTr>
+                    <a:noFill/>
+                  </a:tcPr>
+                </a:tc>
+                <a:extLst>
+                  <a:ext uri="{0D108BD9-81ED-4DB2-BD59-A6C34878D82A}">
+                    <a16:rowId xmlns:a16="http://schemas.microsoft.com/office/drawing/2014/main" val="2502020139"/>
+                  </a:ext>
+                </a:extLst>
+              </a:tr>
+              <a:tr h="894939">
+                <a:tc>
+                  <a:txBody>
+                    <a:bodyPr/>
+                    <a:lstStyle/>
+                    <a:p>
+                      <a:pPr marL="0" marR="0" lvl="0" indent="0" algn="l" defTabSz="914400" rtl="0" eaLnBrk="1" fontAlgn="auto" latinLnBrk="0" hangingPunct="1">
+                        <a:lnSpc>
+                          <a:spcPct val="100000"/>
+                        </a:lnSpc>
+                        <a:spcBef>
+                          <a:spcPts val="500"/>
+                        </a:spcBef>
+                        <a:spcAft>
+                          <a:spcPts val="0"/>
+                        </a:spcAft>
+                        <a:buClrTx/>
+                        <a:buSzTx/>
+                        <a:buFontTx/>
+                        <a:buNone/>
+                        <a:tabLst/>
+                        <a:defRPr/>
+                      </a:pPr>
+                      <a:r>
+                        <a:rPr lang="en-US" sz="1400" dirty="0"/>
+                        <a:t>Releases the validated solution to the production environment.</a:t>
+                      </a:r>
+                      <a:endParaRPr kumimoji="0" lang="de-DE" sz="1400" b="0" i="0" u="none" strike="noStrike" kern="0" cap="none" spc="0" normalizeH="0" baseline="0" noProof="0" dirty="0">
+                        <a:ln>
+                          <a:noFill/>
+                        </a:ln>
+                        <a:solidFill>
+                          <a:srgbClr val="000000"/>
+                        </a:solidFill>
+                        <a:effectLst/>
+                        <a:uLnTx/>
+                        <a:uFillTx/>
+                        <a:latin typeface="+mj-lt"/>
+                        <a:ea typeface="+mn-ea"/>
+                        <a:cs typeface="+mn-cs"/>
+                      </a:endParaRPr>
+                    </a:p>
+                  </a:txBody>
+                  <a:tcPr marL="0" marR="180000" marT="0" marB="0">
+                    <a:lnL w="12700" cmpd="sng">
+                      <a:noFill/>
+                    </a:lnL>
+                    <a:lnR w="12700" cap="flat" cmpd="sng" algn="ctr">
+                      <a:noFill/>
+                      <a:prstDash val="solid"/>
+                      <a:round/>
+                      <a:headEnd type="none" w="med" len="med"/>
+                      <a:tailEnd type="none" w="med" len="med"/>
+                    </a:lnR>
+                    <a:lnT w="38100" cmpd="sng">
+                      <a:noFill/>
+                    </a:lnT>
+                    <a:lnB w="12700" cmpd="sng">
+                      <a:noFill/>
+                    </a:lnB>
+                    <a:lnTlToBr w="12700" cmpd="sng">
+                      <a:noFill/>
+                      <a:prstDash val="solid"/>
+                    </a:lnTlToBr>
+                    <a:lnBlToTr w="12700" cmpd="sng">
+                      <a:noFill/>
+                      <a:prstDash val="solid"/>
+                    </a:lnBlToTr>
+                    <a:noFill/>
+                  </a:tcPr>
+                </a:tc>
+                <a:extLst>
+                  <a:ext uri="{0D108BD9-81ED-4DB2-BD59-A6C34878D82A}">
+                    <a16:rowId xmlns:a16="http://schemas.microsoft.com/office/drawing/2014/main" val="1744734559"/>
+                  </a:ext>
+                </a:extLst>
+              </a:tr>
+            </a:tbl>
+          </a:graphicData>
+        </a:graphic>
+      </p:graphicFrame>
+      <p:graphicFrame>
+        <p:nvGraphicFramePr>
+          <p:cNvPr id="31" name="Inhaltsplatzhalter 5___"/>
+          <p:cNvGraphicFramePr>
+            <a:graphicFrameLocks/>
+          </p:cNvGraphicFramePr>
+          <p:nvPr>
+            <p:extLst>
+              <p:ext uri="{D42A27DB-BD31-4B8C-83A1-F6EECF244321}">
+                <p14:modId xmlns:p14="http://schemas.microsoft.com/office/powerpoint/2010/main" val="4066273938"/>
+              </p:ext>
+            </p:extLst>
+          </p:nvPr>
+        </p:nvGraphicFramePr>
+        <p:xfrm>
+          <a:off x="4374799" y="1491595"/>
+          <a:ext cx="1935477" cy="1174779"/>
+        </p:xfrm>
+        <a:graphic>
+          <a:graphicData uri="http://schemas.openxmlformats.org/drawingml/2006/table">
+            <a:tbl>
+              <a:tblPr firstRow="1" bandRow="1">
+                <a:tableStyleId>{5C22544A-7EE6-4342-B048-85BDC9FD1C3A}</a:tableStyleId>
+              </a:tblPr>
+              <a:tblGrid>
+                <a:gridCol w="1935477">
+                  <a:extLst>
+                    <a:ext uri="{9D8B030D-6E8A-4147-A177-3AD203B41FA5}">
+                      <a16:colId xmlns:a16="http://schemas.microsoft.com/office/drawing/2014/main" val="222448469"/>
+                    </a:ext>
+                  </a:extLst>
+                </a:gridCol>
+              </a:tblGrid>
+              <a:tr h="192221">
+                <a:tc>
+                  <a:txBody>
+                    <a:bodyPr/>
+                    <a:lstStyle/>
+                    <a:p>
+                      <a:pPr marL="0" marR="0" lvl="0" indent="0" algn="l" defTabSz="914400" rtl="0" eaLnBrk="1" fontAlgn="auto" latinLnBrk="0" hangingPunct="1">
+                        <a:lnSpc>
+                          <a:spcPct val="100000"/>
+                        </a:lnSpc>
+                        <a:spcBef>
+                          <a:spcPts val="500"/>
+                        </a:spcBef>
+                        <a:spcAft>
+                          <a:spcPts val="0"/>
+                        </a:spcAft>
+                        <a:buClrTx/>
+                        <a:buSzTx/>
+                        <a:buFontTx/>
+                        <a:buNone/>
+                        <a:tabLst/>
+                        <a:defRPr/>
+                      </a:pPr>
+                      <a:r>
+                        <a:rPr kumimoji="0" lang="de-DE" sz="1600" b="1" i="0" u="none" strike="noStrike" kern="1200" cap="none" spc="0" normalizeH="0" baseline="0" noProof="0" dirty="0">
+                          <a:ln>
+                            <a:noFill/>
+                          </a:ln>
+                          <a:solidFill>
+                            <a:schemeClr val="accent1"/>
+                          </a:solidFill>
+                          <a:effectLst/>
+                          <a:uLnTx/>
+                          <a:uFillTx/>
+                          <a:latin typeface="+mn-lt"/>
+                          <a:ea typeface="+mn-ea"/>
+                          <a:cs typeface="+mn-cs"/>
+                        </a:rPr>
+                        <a:t>Testing</a:t>
+                      </a:r>
+                      <a:endParaRPr kumimoji="0" lang="de-DE" sz="1600" b="1" i="0" u="none" strike="noStrike" kern="0" cap="none" spc="0" normalizeH="0" baseline="0" noProof="0" dirty="0">
+                        <a:ln>
+                          <a:noFill/>
+                        </a:ln>
+                        <a:solidFill>
+                          <a:schemeClr val="tx1"/>
+                        </a:solidFill>
+                        <a:effectLst/>
+                        <a:uLnTx/>
+                        <a:uFillTx/>
+                        <a:latin typeface="+mj-lt"/>
+                        <a:ea typeface="+mn-ea"/>
+                        <a:cs typeface="+mn-cs"/>
+                      </a:endParaRPr>
+                    </a:p>
+                  </a:txBody>
+                  <a:tcPr marL="0" marR="180000" marT="0" marB="36000">
+                    <a:lnL w="12700" cmpd="sng">
+                      <a:noFill/>
+                    </a:lnL>
+                    <a:lnR w="12700" cap="flat" cmpd="sng" algn="ctr">
+                      <a:noFill/>
+                      <a:prstDash val="solid"/>
+                      <a:round/>
+                      <a:headEnd type="none" w="med" len="med"/>
+                      <a:tailEnd type="none" w="med" len="med"/>
+                    </a:lnR>
+                    <a:lnT w="38100" cmpd="sng">
+                      <a:noFill/>
+                    </a:lnT>
+                    <a:lnB w="12700" cmpd="sng">
+                      <a:noFill/>
+                    </a:lnB>
+                    <a:lnTlToBr w="12700" cmpd="sng">
+                      <a:noFill/>
+                      <a:prstDash val="solid"/>
+                    </a:lnTlToBr>
+                    <a:lnBlToTr w="12700" cmpd="sng">
+                      <a:noFill/>
+                      <a:prstDash val="solid"/>
+                    </a:lnBlToTr>
+                    <a:noFill/>
+                  </a:tcPr>
+                </a:tc>
+                <a:extLst>
+                  <a:ext uri="{0D108BD9-81ED-4DB2-BD59-A6C34878D82A}">
+                    <a16:rowId xmlns:a16="http://schemas.microsoft.com/office/drawing/2014/main" val="2502020139"/>
+                  </a:ext>
+                </a:extLst>
+              </a:tr>
+              <a:tr h="894939">
+                <a:tc>
+                  <a:txBody>
+                    <a:bodyPr/>
+                    <a:lstStyle/>
+                    <a:p>
+                      <a:pPr marL="0" marR="0" lvl="0" indent="0" algn="l" defTabSz="914400" rtl="0" eaLnBrk="1" fontAlgn="auto" latinLnBrk="0" hangingPunct="1">
+                        <a:lnSpc>
+                          <a:spcPct val="100000"/>
+                        </a:lnSpc>
+                        <a:spcBef>
+                          <a:spcPts val="500"/>
+                        </a:spcBef>
+                        <a:spcAft>
+                          <a:spcPts val="0"/>
+                        </a:spcAft>
+                        <a:buClrTx/>
+                        <a:buSzTx/>
+                        <a:buFontTx/>
+                        <a:buNone/>
+                        <a:tabLst/>
+                        <a:defRPr/>
+                      </a:pPr>
+                      <a:r>
+                        <a:rPr lang="en-US" sz="1400" dirty="0"/>
+                        <a:t>Validates functionality and identifies defects before deployment.</a:t>
+                      </a:r>
+                      <a:endParaRPr kumimoji="0" lang="de-DE" sz="1400" b="0" i="0" u="none" strike="noStrike" kern="0" cap="none" spc="0" normalizeH="0" baseline="0" noProof="0" dirty="0">
+                        <a:ln>
+                          <a:noFill/>
+                        </a:ln>
+                        <a:solidFill>
+                          <a:schemeClr val="tx1"/>
+                        </a:solidFill>
+                        <a:effectLst/>
+                        <a:uLnTx/>
+                        <a:uFillTx/>
+                        <a:latin typeface="+mj-lt"/>
+                        <a:ea typeface="+mn-ea"/>
+                        <a:cs typeface="+mn-cs"/>
+                      </a:endParaRPr>
+                    </a:p>
+                  </a:txBody>
+                  <a:tcPr marL="0" marR="180000" marT="0" marB="0">
+                    <a:lnL w="12700" cmpd="sng">
+                      <a:noFill/>
+                    </a:lnL>
+                    <a:lnR w="12700" cap="flat" cmpd="sng" algn="ctr">
+                      <a:noFill/>
+                      <a:prstDash val="solid"/>
+                      <a:round/>
+                      <a:headEnd type="none" w="med" len="med"/>
+                      <a:tailEnd type="none" w="med" len="med"/>
+                    </a:lnR>
+                    <a:lnT w="38100" cmpd="sng">
+                      <a:noFill/>
+                    </a:lnT>
+                    <a:lnB w="12700" cmpd="sng">
+                      <a:noFill/>
+                    </a:lnB>
+                    <a:lnTlToBr w="12700" cmpd="sng">
+                      <a:noFill/>
+                      <a:prstDash val="solid"/>
+                    </a:lnTlToBr>
+                    <a:lnBlToTr w="12700" cmpd="sng">
+                      <a:noFill/>
+                      <a:prstDash val="solid"/>
+                    </a:lnBlToTr>
+                    <a:noFill/>
+                  </a:tcPr>
+                </a:tc>
+                <a:extLst>
+                  <a:ext uri="{0D108BD9-81ED-4DB2-BD59-A6C34878D82A}">
+                    <a16:rowId xmlns:a16="http://schemas.microsoft.com/office/drawing/2014/main" val="1744734559"/>
+                  </a:ext>
+                </a:extLst>
+              </a:tr>
+            </a:tbl>
+          </a:graphicData>
+        </a:graphic>
+      </p:graphicFrame>
+      <p:graphicFrame>
+        <p:nvGraphicFramePr>
+          <p:cNvPr id="33" name="Inhaltsplatzhalter 5____"/>
+          <p:cNvGraphicFramePr>
+            <a:graphicFrameLocks/>
+          </p:cNvGraphicFramePr>
+          <p:nvPr>
+            <p:extLst>
+              <p:ext uri="{D42A27DB-BD31-4B8C-83A1-F6EECF244321}">
+                <p14:modId xmlns:p14="http://schemas.microsoft.com/office/powerpoint/2010/main" val="1092872734"/>
+              </p:ext>
+            </p:extLst>
+          </p:nvPr>
+        </p:nvGraphicFramePr>
+        <p:xfrm>
+          <a:off x="7390638" y="1491595"/>
+          <a:ext cx="1935477" cy="1174779"/>
+        </p:xfrm>
+        <a:graphic>
+          <a:graphicData uri="http://schemas.openxmlformats.org/drawingml/2006/table">
+            <a:tbl>
+              <a:tblPr firstRow="1" bandRow="1">
+                <a:tableStyleId>{5C22544A-7EE6-4342-B048-85BDC9FD1C3A}</a:tableStyleId>
+              </a:tblPr>
+              <a:tblGrid>
+                <a:gridCol w="1935477">
+                  <a:extLst>
+                    <a:ext uri="{9D8B030D-6E8A-4147-A177-3AD203B41FA5}">
+                      <a16:colId xmlns:a16="http://schemas.microsoft.com/office/drawing/2014/main" val="222448469"/>
+                    </a:ext>
+                  </a:extLst>
+                </a:gridCol>
+              </a:tblGrid>
+              <a:tr h="192221">
+                <a:tc>
+                  <a:txBody>
+                    <a:bodyPr/>
+                    <a:lstStyle/>
+                    <a:p>
+                      <a:pPr marL="0" marR="0" lvl="0" indent="0" algn="l" defTabSz="914400" rtl="0" eaLnBrk="1" fontAlgn="auto" latinLnBrk="0" hangingPunct="1">
+                        <a:lnSpc>
+                          <a:spcPct val="100000"/>
+                        </a:lnSpc>
+                        <a:spcBef>
+                          <a:spcPts val="500"/>
+                        </a:spcBef>
+                        <a:spcAft>
+                          <a:spcPts val="0"/>
+                        </a:spcAft>
+                        <a:buClrTx/>
+                        <a:buSzTx/>
+                        <a:buFontTx/>
+                        <a:buNone/>
+                        <a:tabLst/>
+                        <a:defRPr/>
+                      </a:pPr>
+                      <a:r>
+                        <a:rPr kumimoji="0" lang="de-DE" sz="1600" b="1" i="0" u="none" strike="noStrike" kern="1200" cap="none" spc="0" normalizeH="0" baseline="0" noProof="0" dirty="0">
+                          <a:ln>
+                            <a:noFill/>
+                          </a:ln>
+                          <a:solidFill>
+                            <a:schemeClr val="accent1"/>
+                          </a:solidFill>
+                          <a:effectLst/>
+                          <a:uLnTx/>
+                          <a:uFillTx/>
+                          <a:latin typeface="+mn-lt"/>
+                          <a:ea typeface="+mn-ea"/>
+                          <a:cs typeface="+mn-cs"/>
+                        </a:rPr>
+                        <a:t>Documentation</a:t>
+                      </a:r>
+                      <a:endParaRPr kumimoji="0" lang="de-DE" sz="1600" b="1" i="0" u="none" strike="noStrike" kern="0" cap="none" spc="0" normalizeH="0" baseline="0" noProof="0" dirty="0">
+                        <a:ln>
+                          <a:noFill/>
+                        </a:ln>
+                        <a:solidFill>
+                          <a:schemeClr val="tx1"/>
+                        </a:solidFill>
+                        <a:effectLst/>
+                        <a:uLnTx/>
+                        <a:uFillTx/>
+                        <a:latin typeface="+mj-lt"/>
+                        <a:ea typeface="+mn-ea"/>
+                        <a:cs typeface="+mn-cs"/>
+                      </a:endParaRPr>
+                    </a:p>
+                  </a:txBody>
+                  <a:tcPr marL="0" marR="180000" marT="0" marB="36000">
+                    <a:lnL w="12700" cmpd="sng">
+                      <a:noFill/>
+                    </a:lnL>
+                    <a:lnR w="12700" cap="flat" cmpd="sng" algn="ctr">
+                      <a:noFill/>
+                      <a:prstDash val="solid"/>
+                      <a:round/>
+                      <a:headEnd type="none" w="med" len="med"/>
+                      <a:tailEnd type="none" w="med" len="med"/>
+                    </a:lnR>
+                    <a:lnT w="38100" cmpd="sng">
+                      <a:noFill/>
+                    </a:lnT>
+                    <a:lnB w="12700" cmpd="sng">
+                      <a:noFill/>
+                    </a:lnB>
+                    <a:lnTlToBr w="12700" cmpd="sng">
+                      <a:noFill/>
+                      <a:prstDash val="solid"/>
+                    </a:lnTlToBr>
+                    <a:lnBlToTr w="12700" cmpd="sng">
+                      <a:noFill/>
+                      <a:prstDash val="solid"/>
+                    </a:lnBlToTr>
+                    <a:noFill/>
+                  </a:tcPr>
+                </a:tc>
+                <a:extLst>
+                  <a:ext uri="{0D108BD9-81ED-4DB2-BD59-A6C34878D82A}">
+                    <a16:rowId xmlns:a16="http://schemas.microsoft.com/office/drawing/2014/main" val="2502020139"/>
+                  </a:ext>
+                </a:extLst>
+              </a:tr>
+              <a:tr h="894939">
+                <a:tc>
+                  <a:txBody>
+                    <a:bodyPr/>
+                    <a:lstStyle/>
+                    <a:p>
+                      <a:pPr marL="0" marR="0" lvl="0" indent="0" algn="l" defTabSz="914400" rtl="0" eaLnBrk="1" fontAlgn="auto" latinLnBrk="0" hangingPunct="1">
+                        <a:lnSpc>
+                          <a:spcPct val="100000"/>
+                        </a:lnSpc>
+                        <a:spcBef>
+                          <a:spcPts val="500"/>
+                        </a:spcBef>
+                        <a:spcAft>
+                          <a:spcPts val="0"/>
+                        </a:spcAft>
+                        <a:buClrTx/>
+                        <a:buSzTx/>
+                        <a:buFontTx/>
+                        <a:buNone/>
+                        <a:tabLst/>
+                        <a:defRPr/>
+                      </a:pPr>
+                      <a:r>
+                        <a:rPr lang="en-US" sz="1400" dirty="0"/>
+                        <a:t>Records key technical and functional information for future reference.</a:t>
+                      </a:r>
+                      <a:endParaRPr kumimoji="0" lang="de-DE" sz="1400" b="0" i="0" u="none" strike="noStrike" kern="0" cap="none" spc="0" normalizeH="0" baseline="0" noProof="0" dirty="0">
+                        <a:ln>
+                          <a:noFill/>
+                        </a:ln>
+                        <a:solidFill>
+                          <a:schemeClr val="tx1"/>
+                        </a:solidFill>
+                        <a:effectLst/>
+                        <a:uLnTx/>
+                        <a:uFillTx/>
+                        <a:latin typeface="+mj-lt"/>
+                        <a:ea typeface="+mn-ea"/>
+                        <a:cs typeface="+mn-cs"/>
+                      </a:endParaRPr>
+                    </a:p>
+                  </a:txBody>
+                  <a:tcPr marL="0" marR="180000" marT="0" marB="0">
+                    <a:lnL w="12700" cmpd="sng">
+                      <a:noFill/>
+                    </a:lnL>
+                    <a:lnR w="12700" cap="flat" cmpd="sng" algn="ctr">
+                      <a:noFill/>
+                      <a:prstDash val="solid"/>
+                      <a:round/>
+                      <a:headEnd type="none" w="med" len="med"/>
+                      <a:tailEnd type="none" w="med" len="med"/>
+                    </a:lnR>
+                    <a:lnT w="38100" cmpd="sng">
+                      <a:noFill/>
+                    </a:lnT>
+                    <a:lnB w="12700" cmpd="sng">
+                      <a:noFill/>
+                    </a:lnB>
+                    <a:lnTlToBr w="12700" cmpd="sng">
+                      <a:noFill/>
+                      <a:prstDash val="solid"/>
+                    </a:lnTlToBr>
+                    <a:lnBlToTr w="12700" cmpd="sng">
+                      <a:noFill/>
+                      <a:prstDash val="solid"/>
+                    </a:lnBlToTr>
+                    <a:noFill/>
+                  </a:tcPr>
+                </a:tc>
+                <a:extLst>
+                  <a:ext uri="{0D108BD9-81ED-4DB2-BD59-A6C34878D82A}">
+                    <a16:rowId xmlns:a16="http://schemas.microsoft.com/office/drawing/2014/main" val="1744734559"/>
+                  </a:ext>
+                </a:extLst>
+              </a:tr>
+            </a:tbl>
+          </a:graphicData>
+        </a:graphic>
+      </p:graphicFrame>
+      <p:grpSp>
+        <p:nvGrpSpPr>
+          <p:cNvPr id="5" name="Gruppieren 4"/>
+          <p:cNvGrpSpPr/>
+          <p:nvPr/>
+        </p:nvGrpSpPr>
+        <p:grpSpPr>
+          <a:xfrm>
+            <a:off x="1167229" y="1491594"/>
+            <a:ext cx="189817" cy="1973323"/>
+            <a:chOff x="1651861" y="1489168"/>
+            <a:chExt cx="189817" cy="1973323"/>
+          </a:xfrm>
+        </p:grpSpPr>
+        <p:cxnSp>
+          <p:nvCxnSpPr>
+            <p:cNvPr id="19" name="Gerader Verbinder 25__"/>
+            <p:cNvCxnSpPr/>
+            <p:nvPr/>
+          </p:nvCxnSpPr>
+          <p:spPr>
+            <a:xfrm>
+              <a:off x="1746769" y="1489168"/>
+              <a:ext cx="0" cy="1878263"/>
+            </a:xfrm>
+            <a:prstGeom prst="line">
+              <a:avLst/>
+            </a:prstGeom>
+            <a:ln w="12700">
+              <a:solidFill>
+                <a:schemeClr val="accent1"/>
+              </a:solidFill>
+            </a:ln>
+          </p:spPr>
+          <p:style>
+            <a:lnRef idx="1">
+              <a:srgbClr val="00884A"/>
+            </a:lnRef>
+            <a:fillRef idx="0">
+              <a:srgbClr val="00884A"/>
+            </a:fillRef>
+            <a:effectRef idx="0">
+              <a:srgbClr val="00884A"/>
+            </a:effectRef>
+            <a:fontRef idx="minor">
+              <a:schemeClr val="tx1"/>
+            </a:fontRef>
+          </p:style>
+        </p:cxnSp>
+        <p:sp>
+          <p:nvSpPr>
+            <p:cNvPr id="14" name="Ellipse 19"/>
+            <p:cNvSpPr/>
+            <p:nvPr/>
+          </p:nvSpPr>
+          <p:spPr>
+            <a:xfrm>
+              <a:off x="1651861" y="3277625"/>
+              <a:ext cx="189817" cy="184866"/>
+            </a:xfrm>
+            <a:prstGeom prst="ellipse">
+              <a:avLst/>
+            </a:prstGeom>
+            <a:solidFill>
+              <a:schemeClr val="accent1"/>
+            </a:solidFill>
+            <a:ln w="9525" cap="flat" cmpd="sng" algn="ctr">
+              <a:noFill/>
+              <a:prstDash val="solid"/>
+              <a:round/>
+              <a:headEnd type="none" w="med" len="med"/>
+              <a:tailEnd type="none" w="med" len="med"/>
+            </a:ln>
+            <a:effectLst/>
+          </p:spPr>
+          <p:txBody>
+            <a:bodyPr rtlCol="0" anchor="ctr"/>
+            <a:lstStyle/>
+            <a:p>
+              <a:pPr marL="0" marR="0" lvl="0" indent="0" algn="ctr" defTabSz="914400" rtl="0" eaLnBrk="1" fontAlgn="auto" latinLnBrk="0" hangingPunct="1">
+                <a:lnSpc>
+                  <a:spcPct val="100000"/>
+                </a:lnSpc>
+                <a:spcBef>
+                  <a:spcPts val="0"/>
+                </a:spcBef>
+                <a:spcAft>
+                  <a:spcPts val="0"/>
+                </a:spcAft>
+                <a:buClrTx/>
+                <a:buSzTx/>
+                <a:buFontTx/>
+                <a:buNone/>
+                <a:tabLst/>
+                <a:defRPr/>
+              </a:pPr>
+              <a:endParaRPr kumimoji="0" lang="de-DE" sz="1800" b="0" i="0" u="none" strike="noStrike" kern="0" cap="none" spc="0" normalizeH="0" baseline="0" noProof="0" dirty="0">
+                <a:ln>
+                  <a:noFill/>
+                </a:ln>
+                <a:solidFill>
+                  <a:srgbClr val="000000"/>
+                </a:solidFill>
+                <a:effectLst/>
+                <a:uLnTx/>
+                <a:uFillTx/>
+                <a:latin typeface="+mn-lt"/>
+                <a:ea typeface="+mn-ea"/>
+                <a:cs typeface="+mn-cs"/>
+              </a:endParaRPr>
+            </a:p>
+          </p:txBody>
+        </p:sp>
+      </p:grpSp>
+      <p:grpSp>
+        <p:nvGrpSpPr>
+          <p:cNvPr id="7" name="Gruppieren 6"/>
+          <p:cNvGrpSpPr/>
+          <p:nvPr/>
+        </p:nvGrpSpPr>
+        <p:grpSpPr>
+          <a:xfrm>
+            <a:off x="2663262" y="3280051"/>
+            <a:ext cx="189817" cy="1969007"/>
+            <a:chOff x="3147894" y="3277625"/>
+            <a:chExt cx="189817" cy="1969007"/>
+          </a:xfrm>
+        </p:grpSpPr>
+        <p:cxnSp>
+          <p:nvCxnSpPr>
+            <p:cNvPr id="28" name="Gerader Verbinder 25"/>
+            <p:cNvCxnSpPr/>
+            <p:nvPr/>
+          </p:nvCxnSpPr>
+          <p:spPr>
+            <a:xfrm>
+              <a:off x="3242802" y="3367432"/>
+              <a:ext cx="0" cy="1879200"/>
+            </a:xfrm>
+            <a:prstGeom prst="line">
+              <a:avLst/>
+            </a:prstGeom>
+            <a:solidFill>
+              <a:srgbClr val="424C58"/>
+            </a:solidFill>
+            <a:ln w="12700">
+              <a:solidFill>
+                <a:srgbClr val="424C58"/>
+              </a:solidFill>
+            </a:ln>
+          </p:spPr>
+          <p:style>
+            <a:lnRef idx="1">
+              <a:srgbClr val="00884A"/>
+            </a:lnRef>
+            <a:fillRef idx="0">
+              <a:srgbClr val="00884A"/>
+            </a:fillRef>
+            <a:effectRef idx="0">
+              <a:srgbClr val="00884A"/>
+            </a:effectRef>
+            <a:fontRef idx="minor">
+              <a:schemeClr val="tx1"/>
+            </a:fontRef>
+          </p:style>
+        </p:cxnSp>
+        <p:sp>
+          <p:nvSpPr>
+            <p:cNvPr id="15" name="Ellipse 19_"/>
+            <p:cNvSpPr/>
+            <p:nvPr/>
+          </p:nvSpPr>
+          <p:spPr>
+            <a:xfrm>
+              <a:off x="3147894" y="3277625"/>
+              <a:ext cx="189817" cy="184866"/>
+            </a:xfrm>
+            <a:prstGeom prst="ellipse">
+              <a:avLst/>
+            </a:prstGeom>
+            <a:solidFill>
+              <a:srgbClr val="424C58"/>
+            </a:solidFill>
+            <a:ln w="9525" cap="flat" cmpd="sng" algn="ctr">
+              <a:solidFill>
+                <a:srgbClr val="424C58"/>
+              </a:solidFill>
+              <a:prstDash val="solid"/>
+              <a:round/>
+              <a:headEnd type="none" w="med" len="med"/>
+              <a:tailEnd type="none" w="med" len="med"/>
+            </a:ln>
+            <a:effectLst/>
+          </p:spPr>
+          <p:txBody>
+            <a:bodyPr rtlCol="0" anchor="ctr"/>
+            <a:lstStyle/>
+            <a:p>
+              <a:pPr marL="0" marR="0" lvl="0" indent="0" algn="ctr" defTabSz="914400" rtl="0" eaLnBrk="1" fontAlgn="auto" latinLnBrk="0" hangingPunct="1">
+                <a:lnSpc>
+                  <a:spcPct val="100000"/>
+                </a:lnSpc>
+                <a:spcBef>
+                  <a:spcPts val="0"/>
+                </a:spcBef>
+                <a:spcAft>
+                  <a:spcPts val="0"/>
+                </a:spcAft>
+                <a:buClrTx/>
+                <a:buSzTx/>
+                <a:buFontTx/>
+                <a:buNone/>
+                <a:tabLst/>
+                <a:defRPr/>
+              </a:pPr>
+              <a:endParaRPr kumimoji="0" lang="de-DE" sz="1800" b="0" i="0" u="none" strike="noStrike" kern="0" cap="none" spc="0" normalizeH="0" baseline="0" noProof="0" dirty="0">
+                <a:ln>
+                  <a:noFill/>
+                </a:ln>
+                <a:solidFill>
+                  <a:srgbClr val="000000"/>
+                </a:solidFill>
+                <a:effectLst/>
+                <a:uLnTx/>
+                <a:uFillTx/>
+                <a:latin typeface="+mn-lt"/>
+                <a:ea typeface="+mn-ea"/>
+                <a:cs typeface="+mn-cs"/>
+              </a:endParaRPr>
+            </a:p>
+          </p:txBody>
+        </p:sp>
+      </p:grpSp>
+      <p:grpSp>
+        <p:nvGrpSpPr>
+          <p:cNvPr id="9" name="Gruppieren 8"/>
+          <p:cNvGrpSpPr/>
+          <p:nvPr/>
+        </p:nvGrpSpPr>
+        <p:grpSpPr>
+          <a:xfrm>
+            <a:off x="4154538" y="1491594"/>
+            <a:ext cx="189817" cy="1973323"/>
+            <a:chOff x="4639170" y="1489168"/>
+            <a:chExt cx="189817" cy="1973323"/>
+          </a:xfrm>
+        </p:grpSpPr>
+        <p:cxnSp>
+          <p:nvCxnSpPr>
+            <p:cNvPr id="32" name="Gerader Verbinder 25___"/>
+            <p:cNvCxnSpPr/>
+            <p:nvPr/>
+          </p:nvCxnSpPr>
+          <p:spPr>
+            <a:xfrm>
+              <a:off x="4734078" y="1489168"/>
+              <a:ext cx="0" cy="1878263"/>
+            </a:xfrm>
+            <a:prstGeom prst="line">
+              <a:avLst/>
+            </a:prstGeom>
+            <a:ln w="12700">
+              <a:solidFill>
+                <a:srgbClr val="424C58"/>
+              </a:solidFill>
+            </a:ln>
+          </p:spPr>
+          <p:style>
+            <a:lnRef idx="1">
+              <a:srgbClr val="00884A"/>
+            </a:lnRef>
+            <a:fillRef idx="0">
+              <a:srgbClr val="00884A"/>
+            </a:fillRef>
+            <a:effectRef idx="0">
+              <a:srgbClr val="00884A"/>
+            </a:effectRef>
+            <a:fontRef idx="minor">
+              <a:schemeClr val="tx1"/>
+            </a:fontRef>
+          </p:style>
+        </p:cxnSp>
+        <p:sp>
+          <p:nvSpPr>
+            <p:cNvPr id="23" name="Ellipse 19__"/>
+            <p:cNvSpPr/>
+            <p:nvPr/>
+          </p:nvSpPr>
+          <p:spPr>
+            <a:xfrm>
+              <a:off x="4639170" y="3277625"/>
+              <a:ext cx="189817" cy="184866"/>
+            </a:xfrm>
+            <a:prstGeom prst="ellipse">
+              <a:avLst/>
+            </a:prstGeom>
+            <a:solidFill>
+              <a:srgbClr val="424C58"/>
+            </a:solidFill>
+            <a:ln w="9525" cap="flat" cmpd="sng" algn="ctr">
+              <a:noFill/>
+              <a:prstDash val="solid"/>
+              <a:round/>
+              <a:headEnd type="none" w="med" len="med"/>
+              <a:tailEnd type="none" w="med" len="med"/>
+            </a:ln>
+            <a:effectLst/>
+          </p:spPr>
+          <p:txBody>
+            <a:bodyPr rtlCol="0" anchor="ctr"/>
+            <a:lstStyle/>
+            <a:p>
+              <a:pPr marL="0" marR="0" lvl="0" indent="0" algn="ctr" defTabSz="914400" rtl="0" eaLnBrk="1" fontAlgn="auto" latinLnBrk="0" hangingPunct="1">
+                <a:lnSpc>
+                  <a:spcPct val="100000"/>
+                </a:lnSpc>
+                <a:spcBef>
+                  <a:spcPts val="0"/>
+                </a:spcBef>
+                <a:spcAft>
+                  <a:spcPts val="0"/>
+                </a:spcAft>
+                <a:buClrTx/>
+                <a:buSzTx/>
+                <a:buFontTx/>
+                <a:buNone/>
+                <a:tabLst/>
+                <a:defRPr/>
+              </a:pPr>
+              <a:endParaRPr kumimoji="0" lang="de-DE" sz="1800" b="0" i="0" u="none" strike="noStrike" kern="0" cap="none" spc="0" normalizeH="0" baseline="0" noProof="0" dirty="0">
+                <a:ln>
+                  <a:noFill/>
+                </a:ln>
+                <a:solidFill>
+                  <a:srgbClr val="000000"/>
+                </a:solidFill>
+                <a:effectLst/>
+                <a:uLnTx/>
+                <a:uFillTx/>
+                <a:latin typeface="+mn-lt"/>
+                <a:ea typeface="+mn-ea"/>
+                <a:cs typeface="+mn-cs"/>
+              </a:endParaRPr>
+            </a:p>
+          </p:txBody>
+        </p:sp>
+      </p:grpSp>
+      <p:grpSp>
+        <p:nvGrpSpPr>
+          <p:cNvPr id="10" name="Gruppieren 9"/>
+          <p:cNvGrpSpPr/>
+          <p:nvPr/>
+        </p:nvGrpSpPr>
+        <p:grpSpPr>
+          <a:xfrm>
+            <a:off x="5650571" y="3280051"/>
+            <a:ext cx="189817" cy="1969007"/>
+            <a:chOff x="6135203" y="3277625"/>
+            <a:chExt cx="189817" cy="1969007"/>
+          </a:xfrm>
+        </p:grpSpPr>
+        <p:cxnSp>
+          <p:nvCxnSpPr>
+            <p:cNvPr id="30" name="Gerader Verbinder 25_"/>
+            <p:cNvCxnSpPr/>
+            <p:nvPr/>
+          </p:nvCxnSpPr>
+          <p:spPr>
+            <a:xfrm>
+              <a:off x="6230111" y="3367432"/>
+              <a:ext cx="0" cy="1879200"/>
+            </a:xfrm>
+            <a:prstGeom prst="line">
+              <a:avLst/>
+            </a:prstGeom>
+            <a:ln w="12700">
+              <a:solidFill>
+                <a:srgbClr val="424C58"/>
+              </a:solidFill>
+            </a:ln>
+          </p:spPr>
+          <p:style>
+            <a:lnRef idx="1">
+              <a:srgbClr val="00884A"/>
+            </a:lnRef>
+            <a:fillRef idx="0">
+              <a:srgbClr val="00884A"/>
+            </a:fillRef>
+            <a:effectRef idx="0">
+              <a:srgbClr val="00884A"/>
+            </a:effectRef>
+            <a:fontRef idx="minor">
+              <a:schemeClr val="tx1"/>
+            </a:fontRef>
+          </p:style>
+        </p:cxnSp>
+        <p:sp>
+          <p:nvSpPr>
+            <p:cNvPr id="24" name="Ellipse 19___"/>
+            <p:cNvSpPr/>
+            <p:nvPr/>
+          </p:nvSpPr>
+          <p:spPr>
+            <a:xfrm>
+              <a:off x="6135203" y="3277625"/>
+              <a:ext cx="189817" cy="184866"/>
+            </a:xfrm>
+            <a:prstGeom prst="ellipse">
+              <a:avLst/>
+            </a:prstGeom>
+            <a:solidFill>
+              <a:srgbClr val="424C58"/>
+            </a:solidFill>
+            <a:ln w="9525" cap="flat" cmpd="sng" algn="ctr">
+              <a:noFill/>
+              <a:prstDash val="solid"/>
+              <a:round/>
+              <a:headEnd type="none" w="med" len="med"/>
+              <a:tailEnd type="none" w="med" len="med"/>
+            </a:ln>
+            <a:effectLst/>
+          </p:spPr>
+          <p:txBody>
+            <a:bodyPr rtlCol="0" anchor="ctr"/>
+            <a:lstStyle/>
+            <a:p>
+              <a:pPr marL="0" marR="0" lvl="0" indent="0" algn="ctr" defTabSz="914400" rtl="0" eaLnBrk="1" fontAlgn="auto" latinLnBrk="0" hangingPunct="1">
+                <a:lnSpc>
+                  <a:spcPct val="100000"/>
+                </a:lnSpc>
+                <a:spcBef>
+                  <a:spcPts val="0"/>
+                </a:spcBef>
+                <a:spcAft>
+                  <a:spcPts val="0"/>
+                </a:spcAft>
+                <a:buClrTx/>
+                <a:buSzTx/>
+                <a:buFontTx/>
+                <a:buNone/>
+                <a:tabLst/>
+                <a:defRPr/>
+              </a:pPr>
+              <a:endParaRPr kumimoji="0" lang="de-DE" sz="1800" b="0" i="0" u="none" strike="noStrike" kern="0" cap="none" spc="0" normalizeH="0" baseline="0" noProof="0" dirty="0">
+                <a:ln>
+                  <a:noFill/>
+                </a:ln>
+                <a:solidFill>
+                  <a:srgbClr val="000000"/>
+                </a:solidFill>
+                <a:effectLst/>
+                <a:uLnTx/>
+                <a:uFillTx/>
+                <a:latin typeface="+mn-lt"/>
+                <a:ea typeface="+mn-ea"/>
+                <a:cs typeface="+mn-cs"/>
+              </a:endParaRPr>
+            </a:p>
+          </p:txBody>
+        </p:sp>
+      </p:grpSp>
+      <p:grpSp>
+        <p:nvGrpSpPr>
+          <p:cNvPr id="11" name="Gruppieren 10"/>
+          <p:cNvGrpSpPr/>
+          <p:nvPr/>
+        </p:nvGrpSpPr>
+        <p:grpSpPr>
+          <a:xfrm>
+            <a:off x="7164488" y="1491594"/>
+            <a:ext cx="189817" cy="1973323"/>
+            <a:chOff x="7618358" y="1489168"/>
+            <a:chExt cx="189817" cy="1973323"/>
+          </a:xfrm>
+        </p:grpSpPr>
+        <p:cxnSp>
+          <p:nvCxnSpPr>
+            <p:cNvPr id="34" name="Gerader Verbinder 25____"/>
+            <p:cNvCxnSpPr/>
+            <p:nvPr/>
+          </p:nvCxnSpPr>
+          <p:spPr>
+            <a:xfrm>
+              <a:off x="7713266" y="1489168"/>
+              <a:ext cx="0" cy="1878263"/>
+            </a:xfrm>
+            <a:prstGeom prst="line">
+              <a:avLst/>
+            </a:prstGeom>
+            <a:ln w="12700">
+              <a:solidFill>
+                <a:srgbClr val="424C58"/>
+              </a:solidFill>
+            </a:ln>
+          </p:spPr>
+          <p:style>
+            <a:lnRef idx="1">
+              <a:srgbClr val="00884A"/>
+            </a:lnRef>
+            <a:fillRef idx="0">
+              <a:srgbClr val="00884A"/>
+            </a:fillRef>
+            <a:effectRef idx="0">
+              <a:srgbClr val="00884A"/>
+            </a:effectRef>
+            <a:fontRef idx="minor">
+              <a:schemeClr val="tx1"/>
+            </a:fontRef>
+          </p:style>
+        </p:cxnSp>
+        <p:sp>
+          <p:nvSpPr>
+            <p:cNvPr id="25" name="Ellipse 19____"/>
+            <p:cNvSpPr/>
+            <p:nvPr/>
+          </p:nvSpPr>
+          <p:spPr>
+            <a:xfrm>
+              <a:off x="7618358" y="3277625"/>
+              <a:ext cx="189817" cy="184866"/>
+            </a:xfrm>
+            <a:prstGeom prst="ellipse">
+              <a:avLst/>
+            </a:prstGeom>
+            <a:solidFill>
+              <a:srgbClr val="424C58"/>
+            </a:solidFill>
+            <a:ln w="9525" cap="flat" cmpd="sng" algn="ctr">
+              <a:noFill/>
+              <a:prstDash val="solid"/>
+              <a:round/>
+              <a:headEnd type="none" w="med" len="med"/>
+              <a:tailEnd type="none" w="med" len="med"/>
+            </a:ln>
+            <a:effectLst/>
+          </p:spPr>
+          <p:txBody>
+            <a:bodyPr rtlCol="0" anchor="ctr"/>
+            <a:lstStyle/>
+            <a:p>
+              <a:pPr marL="0" marR="0" lvl="0" indent="0" algn="ctr" defTabSz="914400" rtl="0" eaLnBrk="1" fontAlgn="auto" latinLnBrk="0" hangingPunct="1">
+                <a:lnSpc>
+                  <a:spcPct val="100000"/>
+                </a:lnSpc>
+                <a:spcBef>
+                  <a:spcPts val="0"/>
+                </a:spcBef>
+                <a:spcAft>
+                  <a:spcPts val="0"/>
+                </a:spcAft>
+                <a:buClrTx/>
+                <a:buSzTx/>
+                <a:buFontTx/>
+                <a:buNone/>
+                <a:tabLst/>
+                <a:defRPr/>
+              </a:pPr>
+              <a:endParaRPr kumimoji="0" lang="de-DE" sz="1800" b="0" i="0" u="none" strike="noStrike" kern="0" cap="none" spc="0" normalizeH="0" baseline="0" noProof="0" dirty="0">
+                <a:ln>
+                  <a:noFill/>
+                </a:ln>
+                <a:solidFill>
+                  <a:srgbClr val="000000"/>
+                </a:solidFill>
+                <a:effectLst/>
+                <a:uLnTx/>
+                <a:uFillTx/>
+                <a:latin typeface="+mn-lt"/>
+                <a:ea typeface="+mn-ea"/>
+                <a:cs typeface="+mn-cs"/>
+              </a:endParaRPr>
+            </a:p>
+          </p:txBody>
+        </p:sp>
+      </p:grpSp>
+      <p:cxnSp>
+        <p:nvCxnSpPr>
+          <p:cNvPr id="27" name="Gerader Verbinder 25_____"/>
+          <p:cNvCxnSpPr/>
+          <p:nvPr/>
+        </p:nvCxnSpPr>
+        <p:spPr>
+          <a:xfrm>
+            <a:off x="8772445" y="2836453"/>
+            <a:ext cx="0" cy="1066808"/>
+          </a:xfrm>
+          <a:prstGeom prst="line">
+            <a:avLst/>
+          </a:prstGeom>
+          <a:ln w="12700" cap="flat" cmpd="sng" algn="ctr">
+            <a:solidFill>
+              <a:schemeClr val="accent2"/>
+            </a:solidFill>
+            <a:prstDash val="solid"/>
+            <a:miter lim="800000"/>
+            <a:headEnd type="none" w="med" len="med"/>
+            <a:tailEnd type="none" w="med" len="med"/>
+          </a:ln>
+        </p:spPr>
+        <p:style>
+          <a:lnRef idx="1">
+            <a:srgbClr val="00884A"/>
+          </a:lnRef>
+          <a:fillRef idx="0">
+            <a:srgbClr val="00884A"/>
+          </a:fillRef>
+          <a:effectRef idx="0">
+            <a:srgbClr val="00884A"/>
+          </a:effectRef>
+          <a:fontRef idx="minor">
+            <a:schemeClr val="tx1"/>
+          </a:fontRef>
+        </p:style>
+      </p:cxnSp>
+      <p:sp>
+        <p:nvSpPr>
+          <p:cNvPr id="26" name="Ellipse 19_____"/>
+          <p:cNvSpPr/>
+          <p:nvPr/>
+        </p:nvSpPr>
+        <p:spPr>
+          <a:xfrm>
+            <a:off x="8675885" y="3277424"/>
+            <a:ext cx="189817" cy="184866"/>
+          </a:xfrm>
+          <a:prstGeom prst="ellipse">
+            <a:avLst/>
+          </a:prstGeom>
+          <a:solidFill>
+            <a:schemeClr val="accent2"/>
+          </a:solidFill>
+          <a:ln w="9525" cap="flat" cmpd="sng" algn="ctr">
+            <a:noFill/>
+            <a:prstDash val="solid"/>
+            <a:round/>
+            <a:headEnd type="none" w="med" len="med"/>
+            <a:tailEnd type="none" w="med" len="med"/>
+          </a:ln>
+          <a:effectLst/>
+        </p:spPr>
+        <p:txBody>
+          <a:bodyPr rtlCol="0" anchor="ctr"/>
+          <a:lstStyle/>
+          <a:p>
+            <a:pPr marL="0" marR="0" lvl="0" indent="0" algn="ctr" defTabSz="914400" rtl="0" eaLnBrk="1" fontAlgn="auto" latinLnBrk="0" hangingPunct="1">
+              <a:lnSpc>
+                <a:spcPct val="100000"/>
+              </a:lnSpc>
+              <a:spcBef>
+                <a:spcPts val="0"/>
+              </a:spcBef>
+              <a:spcAft>
+                <a:spcPts val="0"/>
+              </a:spcAft>
+              <a:buClrTx/>
+              <a:buSzTx/>
+              <a:buFontTx/>
+              <a:buNone/>
+              <a:tabLst/>
+              <a:defRPr/>
+            </a:pPr>
+            <a:endParaRPr kumimoji="0" lang="de-DE" sz="1800" b="0" i="0" u="none" strike="noStrike" kern="0" cap="none" spc="0" normalizeH="0" baseline="0" noProof="0" dirty="0">
+              <a:ln>
+                <a:noFill/>
+              </a:ln>
+              <a:solidFill>
+                <a:srgbClr val="000000"/>
+              </a:solidFill>
+              <a:effectLst/>
+              <a:uLnTx/>
+              <a:uFillTx/>
+              <a:latin typeface="+mn-lt"/>
+              <a:ea typeface="+mn-ea"/>
+              <a:cs typeface="+mn-cs"/>
+            </a:endParaRPr>
+          </a:p>
+        </p:txBody>
+      </p:sp>
+      <p:sp>
+        <p:nvSpPr>
+          <p:cNvPr id="4" name="Foliennummernplatzhalter 3">
+            <a:extLst>
+              <a:ext uri="{FF2B5EF4-FFF2-40B4-BE49-F238E27FC236}">
+                <a16:creationId xmlns:a16="http://schemas.microsoft.com/office/drawing/2014/main" id="{902EA211-C0FC-2413-084D-F2B2B69702A6}"/>
+              </a:ext>
+            </a:extLst>
+          </p:cNvPr>
+          <p:cNvSpPr>
+            <a:spLocks noGrp="1"/>
+          </p:cNvSpPr>
+          <p:nvPr>
+            <p:ph type="sldNum" sz="quarter" idx="12"/>
+          </p:nvPr>
+        </p:nvSpPr>
+        <p:spPr/>
+        <p:txBody>
+          <a:bodyPr/>
+          <a:lstStyle/>
+          <a:p>
+            <a:fld id="{4898AEC0-503E-4FA4-859C-D0F72D6E3F79}" type="slidenum">
+              <a:rPr lang="en-US" noProof="1" smtClean="0"/>
+              <a:pPr/>
+              <a:t>11</a:t>
+            </a:fld>
+            <a:endParaRPr lang="en-US" noProof="1"/>
+          </a:p>
+        </p:txBody>
+      </p:sp>
+      <p:cxnSp>
+        <p:nvCxnSpPr>
+          <p:cNvPr id="13" name="Gerader Verbinder 25____">
+            <a:extLst>
+              <a:ext uri="{FF2B5EF4-FFF2-40B4-BE49-F238E27FC236}">
+                <a16:creationId xmlns:a16="http://schemas.microsoft.com/office/drawing/2014/main" id="{6FA816E6-D863-B423-D6D7-5316EFB2465F}"/>
+              </a:ext>
+            </a:extLst>
+          </p:cNvPr>
+          <p:cNvCxnSpPr/>
+          <p:nvPr/>
+        </p:nvCxnSpPr>
+        <p:spPr>
+          <a:xfrm>
+            <a:off x="8770714" y="3470440"/>
+            <a:ext cx="0" cy="1878263"/>
+          </a:xfrm>
+          <a:prstGeom prst="line">
+            <a:avLst/>
+          </a:prstGeom>
+          <a:ln w="12700">
+            <a:solidFill>
+              <a:srgbClr val="424C58"/>
+            </a:solidFill>
+          </a:ln>
+        </p:spPr>
+        <p:style>
+          <a:lnRef idx="1">
+            <a:srgbClr val="00884A"/>
+          </a:lnRef>
+          <a:fillRef idx="0">
+            <a:srgbClr val="00884A"/>
+          </a:fillRef>
+          <a:effectRef idx="0">
+            <a:srgbClr val="00884A"/>
+          </a:effectRef>
+          <a:fontRef idx="minor">
+            <a:schemeClr val="tx1"/>
+          </a:fontRef>
+        </p:style>
+      </p:cxnSp>
+      <p:graphicFrame>
+        <p:nvGraphicFramePr>
+          <p:cNvPr id="20" name="Inhaltsplatzhalter 5____">
+            <a:extLst>
+              <a:ext uri="{FF2B5EF4-FFF2-40B4-BE49-F238E27FC236}">
+                <a16:creationId xmlns:a16="http://schemas.microsoft.com/office/drawing/2014/main" id="{A98F27A4-9C1E-1B3D-6FE0-8FAB915BD763}"/>
+              </a:ext>
+            </a:extLst>
+          </p:cNvPr>
+          <p:cNvGraphicFramePr>
+            <a:graphicFrameLocks/>
+          </p:cNvGraphicFramePr>
+          <p:nvPr>
+            <p:extLst>
+              <p:ext uri="{D42A27DB-BD31-4B8C-83A1-F6EECF244321}">
+                <p14:modId xmlns:p14="http://schemas.microsoft.com/office/powerpoint/2010/main" val="4209196753"/>
+              </p:ext>
+            </p:extLst>
+          </p:nvPr>
+        </p:nvGraphicFramePr>
+        <p:xfrm>
+          <a:off x="8897821" y="3910174"/>
+          <a:ext cx="1935477" cy="1418619"/>
+        </p:xfrm>
+        <a:graphic>
+          <a:graphicData uri="http://schemas.openxmlformats.org/drawingml/2006/table">
+            <a:tbl>
+              <a:tblPr firstRow="1" bandRow="1">
+                <a:tableStyleId>{5C22544A-7EE6-4342-B048-85BDC9FD1C3A}</a:tableStyleId>
+              </a:tblPr>
+              <a:tblGrid>
+                <a:gridCol w="1935477">
+                  <a:extLst>
+                    <a:ext uri="{9D8B030D-6E8A-4147-A177-3AD203B41FA5}">
+                      <a16:colId xmlns:a16="http://schemas.microsoft.com/office/drawing/2014/main" val="222448469"/>
+                    </a:ext>
+                  </a:extLst>
+                </a:gridCol>
+              </a:tblGrid>
+              <a:tr h="192221">
+                <a:tc>
+                  <a:txBody>
+                    <a:bodyPr/>
+                    <a:lstStyle/>
+                    <a:p>
+                      <a:pPr marL="0" marR="0" lvl="0" indent="0" algn="l" defTabSz="914400" rtl="0" eaLnBrk="1" fontAlgn="auto" latinLnBrk="0" hangingPunct="1">
+                        <a:lnSpc>
+                          <a:spcPct val="100000"/>
+                        </a:lnSpc>
+                        <a:spcBef>
+                          <a:spcPts val="500"/>
+                        </a:spcBef>
+                        <a:spcAft>
+                          <a:spcPts val="0"/>
+                        </a:spcAft>
+                        <a:buClrTx/>
+                        <a:buSzTx/>
+                        <a:buFontTx/>
+                        <a:buNone/>
+                        <a:tabLst/>
+                        <a:defRPr/>
+                      </a:pPr>
+                      <a:r>
+                        <a:rPr kumimoji="0" lang="de-DE" sz="1600" b="1" i="0" u="none" strike="noStrike" kern="1200" cap="none" spc="0" normalizeH="0" baseline="0" noProof="0" dirty="0">
+                          <a:ln>
+                            <a:noFill/>
+                          </a:ln>
+                          <a:solidFill>
+                            <a:schemeClr val="accent1"/>
+                          </a:solidFill>
+                          <a:effectLst/>
+                          <a:uLnTx/>
+                          <a:uFillTx/>
+                          <a:latin typeface="+mn-lt"/>
+                          <a:ea typeface="+mn-ea"/>
+                          <a:cs typeface="+mn-cs"/>
+                        </a:rPr>
+                        <a:t>SMC Implementation</a:t>
+                      </a:r>
+                      <a:endParaRPr kumimoji="0" lang="de-DE" sz="1600" b="1" i="0" u="none" strike="noStrike" kern="0" cap="none" spc="0" normalizeH="0" baseline="0" noProof="0" dirty="0">
+                        <a:ln>
+                          <a:noFill/>
+                        </a:ln>
+                        <a:solidFill>
+                          <a:schemeClr val="tx1"/>
+                        </a:solidFill>
+                        <a:effectLst/>
+                        <a:uLnTx/>
+                        <a:uFillTx/>
+                        <a:latin typeface="+mj-lt"/>
+                        <a:ea typeface="+mn-ea"/>
+                        <a:cs typeface="+mn-cs"/>
+                      </a:endParaRPr>
+                    </a:p>
+                  </a:txBody>
+                  <a:tcPr marL="0" marR="180000" marT="0" marB="36000">
+                    <a:lnL w="12700" cmpd="sng">
+                      <a:noFill/>
+                    </a:lnL>
+                    <a:lnR w="12700" cap="flat" cmpd="sng" algn="ctr">
+                      <a:noFill/>
+                      <a:prstDash val="solid"/>
+                      <a:round/>
+                      <a:headEnd type="none" w="med" len="med"/>
+                      <a:tailEnd type="none" w="med" len="med"/>
+                    </a:lnR>
+                    <a:lnT w="38100" cmpd="sng">
+                      <a:noFill/>
+                    </a:lnT>
+                    <a:lnB w="12700" cmpd="sng">
+                      <a:noFill/>
+                    </a:lnB>
+                    <a:lnTlToBr w="12700" cmpd="sng">
+                      <a:noFill/>
+                      <a:prstDash val="solid"/>
+                    </a:lnTlToBr>
+                    <a:lnBlToTr w="12700" cmpd="sng">
+                      <a:noFill/>
+                      <a:prstDash val="solid"/>
+                    </a:lnBlToTr>
+                    <a:noFill/>
+                  </a:tcPr>
+                </a:tc>
+                <a:extLst>
+                  <a:ext uri="{0D108BD9-81ED-4DB2-BD59-A6C34878D82A}">
+                    <a16:rowId xmlns:a16="http://schemas.microsoft.com/office/drawing/2014/main" val="2502020139"/>
+                  </a:ext>
+                </a:extLst>
+              </a:tr>
+              <a:tr h="894939">
+                <a:tc>
+                  <a:txBody>
+                    <a:bodyPr/>
+                    <a:lstStyle/>
+                    <a:p>
+                      <a:pPr marL="0" marR="0" lvl="0" indent="0" algn="l" defTabSz="914400" rtl="0" eaLnBrk="1" fontAlgn="auto" latinLnBrk="0" hangingPunct="1">
+                        <a:lnSpc>
+                          <a:spcPct val="100000"/>
+                        </a:lnSpc>
+                        <a:spcBef>
+                          <a:spcPts val="500"/>
+                        </a:spcBef>
+                        <a:spcAft>
+                          <a:spcPts val="0"/>
+                        </a:spcAft>
+                        <a:buClrTx/>
+                        <a:buSzTx/>
+                        <a:buFontTx/>
+                        <a:buNone/>
+                        <a:tabLst/>
+                        <a:defRPr/>
+                      </a:pPr>
+                      <a:r>
+                        <a:rPr kumimoji="0" lang="de-DE" sz="1400" b="0" i="0" u="none" strike="noStrike" kern="0" cap="none" spc="0" normalizeH="0" baseline="0" noProof="0" dirty="0">
+                          <a:ln>
+                            <a:noFill/>
+                          </a:ln>
+                          <a:solidFill>
+                            <a:schemeClr val="tx1"/>
+                          </a:solidFill>
+                          <a:effectLst/>
+                          <a:uLnTx/>
+                          <a:uFillTx/>
+                          <a:latin typeface="+mj-lt"/>
+                          <a:ea typeface="+mn-ea"/>
+                          <a:cs typeface="+mn-cs"/>
+                        </a:rPr>
+                        <a:t>Implement this solution with SMC system.</a:t>
+                      </a:r>
+                    </a:p>
+                  </a:txBody>
+                  <a:tcPr marL="0" marR="180000" marT="0" marB="0">
+                    <a:lnL w="12700" cmpd="sng">
+                      <a:noFill/>
+                    </a:lnL>
+                    <a:lnR w="12700" cap="flat" cmpd="sng" algn="ctr">
+                      <a:noFill/>
+                      <a:prstDash val="solid"/>
+                      <a:round/>
+                      <a:headEnd type="none" w="med" len="med"/>
+                      <a:tailEnd type="none" w="med" len="med"/>
+                    </a:lnR>
+                    <a:lnT w="38100" cmpd="sng">
+                      <a:noFill/>
+                    </a:lnT>
+                    <a:lnB w="12700" cmpd="sng">
+                      <a:noFill/>
+                    </a:lnB>
+                    <a:lnTlToBr w="12700" cmpd="sng">
+                      <a:noFill/>
+                      <a:prstDash val="solid"/>
+                    </a:lnTlToBr>
+                    <a:lnBlToTr w="12700" cmpd="sng">
+                      <a:noFill/>
+                      <a:prstDash val="solid"/>
+                    </a:lnBlToTr>
+                    <a:noFill/>
+                  </a:tcPr>
+                </a:tc>
+                <a:extLst>
+                  <a:ext uri="{0D108BD9-81ED-4DB2-BD59-A6C34878D82A}">
+                    <a16:rowId xmlns:a16="http://schemas.microsoft.com/office/drawing/2014/main" val="1744734559"/>
+                  </a:ext>
+                </a:extLst>
+              </a:tr>
+            </a:tbl>
+          </a:graphicData>
+        </a:graphic>
+      </p:graphicFrame>
+    </p:spTree>
+    <p:custDataLst>
+      <p:tags r:id="rId2"/>
+    </p:custDataLst>
+    <p:extLst>
+      <p:ext uri="{BB962C8B-B14F-4D97-AF65-F5344CB8AC3E}">
+        <p14:creationId xmlns:p14="http://schemas.microsoft.com/office/powerpoint/2010/main" val="1950574467"/>
+      </p:ext>
+    </p:extLst>
+  </p:cSld>
+  <p:clrMapOvr>
+    <a:masterClrMapping/>
+  </p:clrMapOvr>
+</p:sld>
+</file>
+
 <file path=ppt/slides/slide2.xml><?xml version="1.0" encoding="utf-8"?>
 <p:sld xmlns:a="http://schemas.openxmlformats.org/drawingml/2006/main" xmlns:r="http://schemas.openxmlformats.org/officeDocument/2006/relationships" xmlns:p="http://schemas.openxmlformats.org/presentationml/2006/main">
   <p:cSld>
@@ -9326,7 +12160,7 @@
               <a:rPr lang="en-US" sz="2400" b="1" dirty="0">
                 <a:latin typeface="Bosch Sans" panose="020B0604020202020204" pitchFamily="34" charset="0"/>
               </a:rPr>
-              <a:t>Current State</a:t>
+              <a:t>Background</a:t>
             </a:r>
             <a:endParaRPr lang="en-US" sz="2400" b="1" kern="0" dirty="0">
               <a:solidFill>
@@ -9347,7 +12181,7 @@
             </a:extLst>
           </p:cNvPr>
           <p:cNvPicPr>
-            <a:picLocks noChangeAspect="1"/>
+            <a:picLocks noGrp="1" noChangeAspect="1"/>
           </p:cNvPicPr>
           <p:nvPr>
             <p:ph type="pic" sz="quarter" idx="1"/>
@@ -11531,10 +14365,13 @@
       </p:sp>
       <p:pic>
         <p:nvPicPr>
-          <p:cNvPr id="9" name="Picture 8">
+          <p:cNvPr id="5" name="Picture 4">
             <a:extLst>
               <a:ext uri="{FF2B5EF4-FFF2-40B4-BE49-F238E27FC236}">
-                <a16:creationId xmlns:a16="http://schemas.microsoft.com/office/drawing/2014/main" id="{46967C8B-C115-3CB2-A7E1-8C63CBA74E6E}"/>
+                <a16:creationId xmlns:a16="http://schemas.microsoft.com/office/drawing/2014/main" id="{35768C88-06BA-E63A-298E-00859D93CF5E}"/>
+              </a:ext>
+              <a:ext uri="{C183D7F6-B498-43B3-948B-1728B52AA6E4}">
+                <adec:decorative xmlns:adec="http://schemas.microsoft.com/office/drawing/2017/decorative" val="1"/>
               </a:ext>
             </a:extLst>
           </p:cNvPr>
@@ -11545,15 +14382,14 @@
         </p:nvPicPr>
         <p:blipFill>
           <a:blip r:embed="rId4"/>
-          <a:srcRect t="994" r="21360"/>
           <a:stretch>
             <a:fillRect/>
           </a:stretch>
         </p:blipFill>
         <p:spPr>
           <a:xfrm>
-            <a:off x="3781960" y="1799748"/>
-            <a:ext cx="6769147" cy="3471163"/>
+            <a:off x="3610434" y="1575509"/>
+            <a:ext cx="6823857" cy="3683170"/>
           </a:xfrm>
           <a:prstGeom prst="rect">
             <a:avLst/>
@@ -13036,10 +15872,13 @@
       </p:sp>
       <p:pic>
         <p:nvPicPr>
-          <p:cNvPr id="9" name="Picture 8">
+          <p:cNvPr id="5" name="Picture 4">
             <a:extLst>
               <a:ext uri="{FF2B5EF4-FFF2-40B4-BE49-F238E27FC236}">
-                <a16:creationId xmlns:a16="http://schemas.microsoft.com/office/drawing/2014/main" id="{C5E2E8A3-9D87-0769-EAA3-F1AD0BCA5527}"/>
+                <a16:creationId xmlns:a16="http://schemas.microsoft.com/office/drawing/2014/main" id="{72CA6B21-7FB9-547F-7A2A-C988E2298454}"/>
+              </a:ext>
+              <a:ext uri="{C183D7F6-B498-43B3-948B-1728B52AA6E4}">
+                <adec:decorative xmlns:adec="http://schemas.microsoft.com/office/drawing/2017/decorative" val="1"/>
               </a:ext>
             </a:extLst>
           </p:cNvPr>
@@ -13050,21 +15889,102 @@
         </p:nvPicPr>
         <p:blipFill>
           <a:blip r:embed="rId4"/>
-          <a:srcRect t="994" r="21360"/>
           <a:stretch>
             <a:fillRect/>
           </a:stretch>
         </p:blipFill>
         <p:spPr>
           <a:xfrm>
-            <a:off x="3781960" y="1799748"/>
-            <a:ext cx="6769147" cy="3471163"/>
+            <a:off x="3795466" y="1634396"/>
+            <a:ext cx="6605654" cy="3565395"/>
           </a:xfrm>
           <a:prstGeom prst="rect">
             <a:avLst/>
           </a:prstGeom>
         </p:spPr>
       </p:pic>
+      <p:sp>
+        <p:nvSpPr>
+          <p:cNvPr id="8" name="Rectangle 7">
+            <a:extLst>
+              <a:ext uri="{FF2B5EF4-FFF2-40B4-BE49-F238E27FC236}">
+                <a16:creationId xmlns:a16="http://schemas.microsoft.com/office/drawing/2014/main" id="{79692731-0B83-3769-01AB-BA28794692F4}"/>
+              </a:ext>
+            </a:extLst>
+          </p:cNvPr>
+          <p:cNvSpPr/>
+          <p:nvPr/>
+        </p:nvSpPr>
+        <p:spPr>
+          <a:xfrm>
+            <a:off x="6108192" y="2670048"/>
+            <a:ext cx="3209544" cy="283315"/>
+          </a:xfrm>
+          <a:prstGeom prst="rect">
+            <a:avLst/>
+          </a:prstGeom>
+          <a:noFill/>
+          <a:ln w="57150" cap="flat" cmpd="sng" algn="ctr">
+            <a:solidFill>
+              <a:schemeClr val="accent3"/>
+            </a:solidFill>
+            <a:prstDash val="solid"/>
+            <a:round/>
+            <a:headEnd type="none" w="med" len="med"/>
+            <a:tailEnd type="none" w="med" len="med"/>
+          </a:ln>
+        </p:spPr>
+        <p:style>
+          <a:lnRef idx="0">
+            <a:scrgbClr r="0" g="0" b="0"/>
+          </a:lnRef>
+          <a:fillRef idx="0">
+            <a:scrgbClr r="0" g="0" b="0"/>
+          </a:fillRef>
+          <a:effectRef idx="0">
+            <a:scrgbClr r="0" g="0" b="0"/>
+          </a:effectRef>
+          <a:fontRef idx="minor">
+            <a:schemeClr val="accent3"/>
+          </a:fontRef>
+        </p:style>
+        <p:txBody>
+          <a:bodyPr rtlCol="0" anchor="ctr"/>
+          <a:lstStyle/>
+          <a:p>
+            <a:pPr marL="0" marR="0" indent="0" algn="ctr" defTabSz="914400" eaLnBrk="1" fontAlgn="auto" latinLnBrk="0" hangingPunct="1">
+              <a:lnSpc>
+                <a:spcPct val="100000"/>
+              </a:lnSpc>
+              <a:spcBef>
+                <a:spcPts val="0"/>
+              </a:spcBef>
+              <a:spcAft>
+                <a:spcPts val="0"/>
+              </a:spcAft>
+              <a:buClrTx/>
+              <a:buSzTx/>
+              <a:buFontTx/>
+              <a:buNone/>
+              <a:tabLst/>
+            </a:pPr>
+            <a:endParaRPr kumimoji="0" lang="en-US" sz="1800" b="0" i="0" u="none" strike="noStrike" kern="0" cap="none" spc="0" normalizeH="0" baseline="0" noProof="0" dirty="0">
+              <a:ln>
+                <a:noFill/>
+              </a:ln>
+              <a:solidFill>
+                <a:srgbClr val="000000"/>
+              </a:solidFill>
+              <a:effectLst/>
+              <a:uLnTx/>
+              <a:uFillTx/>
+              <a:latin typeface="Bosch Office Sans"/>
+              <a:ea typeface="+mn-ea"/>
+              <a:cs typeface="+mn-cs"/>
+            </a:endParaRPr>
+          </a:p>
+        </p:txBody>
+      </p:sp>
     </p:spTree>
     <p:custDataLst>
       <p:tags r:id="rId2"/>
@@ -14029,7 +16949,7 @@
           <a:p>
             <a:r>
               <a:rPr lang="de-DE" dirty="0"/>
-              <a:t>Subheadline</a:t>
+              <a:t>Gemba Dashboard</a:t>
             </a:r>
           </a:p>
         </p:txBody>
@@ -14063,880 +16983,6 @@
           </a:p>
         </p:txBody>
       </p:sp>
-      <p:sp>
-        <p:nvSpPr>
-          <p:cNvPr id="9" name="Inhaltsplatzhalter 7___"/>
-          <p:cNvSpPr txBox="1">
-            <a:spLocks/>
-          </p:cNvSpPr>
-          <p:nvPr/>
-        </p:nvSpPr>
-        <p:spPr>
-          <a:xfrm>
-            <a:off x="1592580" y="1760884"/>
-            <a:ext cx="2340000" cy="3136218"/>
-          </a:xfrm>
-          <a:prstGeom prst="rect">
-            <a:avLst/>
-          </a:prstGeom>
-          <a:solidFill>
-            <a:schemeClr val="accent1"/>
-          </a:solidFill>
-        </p:spPr>
-        <p:txBody>
-          <a:bodyPr vert="horz" lIns="180000" tIns="144000" rIns="90000" bIns="90000" rtlCol="0">
-            <a:noAutofit/>
-          </a:bodyPr>
-          <a:lstStyle>
-            <a:lvl1pPr marL="251982" indent="-251982" algn="l" defTabSz="914333" rtl="0" eaLnBrk="1" latinLnBrk="0" hangingPunct="1">
-              <a:lnSpc>
-                <a:spcPct val="107000"/>
-              </a:lnSpc>
-              <a:spcBef>
-                <a:spcPts val="500"/>
-              </a:spcBef>
-              <a:buFont typeface="Wingdings 3" panose="05040102010807070707" pitchFamily="18" charset="2"/>
-              <a:buChar char=""/>
-              <a:defRPr sz="1800" kern="1200">
-                <a:solidFill>
-                  <a:schemeClr val="tx1"/>
-                </a:solidFill>
-                <a:latin typeface="Bosch Sans Regular" panose="020B0604020202020204" pitchFamily="34" charset="0"/>
-                <a:ea typeface="+mn-ea"/>
-                <a:cs typeface="+mn-cs"/>
-              </a:defRPr>
-            </a:lvl1pPr>
-            <a:lvl2pPr marL="507563" indent="-273580" algn="l" defTabSz="914333" rtl="0" eaLnBrk="1" latinLnBrk="0" hangingPunct="1">
-              <a:lnSpc>
-                <a:spcPct val="103000"/>
-              </a:lnSpc>
-              <a:spcBef>
-                <a:spcPts val="500"/>
-              </a:spcBef>
-              <a:buFont typeface="Wingdings 3" panose="05040102010807070707" pitchFamily="18" charset="2"/>
-              <a:buChar char=""/>
-              <a:defRPr sz="1600" kern="1200">
-                <a:solidFill>
-                  <a:schemeClr val="tx1"/>
-                </a:solidFill>
-                <a:latin typeface="Bosch Sans Regular" panose="020B0604020202020204" pitchFamily="34" charset="0"/>
-                <a:ea typeface="+mn-ea"/>
-                <a:cs typeface="+mn-cs"/>
-              </a:defRPr>
-            </a:lvl2pPr>
-            <a:lvl3pPr marL="730746" indent="-205185" algn="l" defTabSz="914333" rtl="0" eaLnBrk="1" latinLnBrk="0" hangingPunct="1">
-              <a:lnSpc>
-                <a:spcPct val="102000"/>
-              </a:lnSpc>
-              <a:spcBef>
-                <a:spcPts val="500"/>
-              </a:spcBef>
-              <a:buFont typeface="Bosch Office Sans" pitchFamily="2" charset="0"/>
-              <a:buChar char="‒"/>
-              <a:defRPr sz="1400" kern="1200">
-                <a:solidFill>
-                  <a:schemeClr val="tx1"/>
-                </a:solidFill>
-                <a:latin typeface="Bosch Sans Regular" panose="020B0604020202020204" pitchFamily="34" charset="0"/>
-                <a:ea typeface="+mn-ea"/>
-                <a:cs typeface="+mn-cs"/>
-              </a:defRPr>
-            </a:lvl3pPr>
-            <a:lvl4pPr marL="932331" indent="-183586" algn="l" defTabSz="914333" rtl="0" eaLnBrk="1" latinLnBrk="0" hangingPunct="1">
-              <a:lnSpc>
-                <a:spcPct val="103000"/>
-              </a:lnSpc>
-              <a:spcBef>
-                <a:spcPts val="500"/>
-              </a:spcBef>
-              <a:buFont typeface="Bosch Office Sans" pitchFamily="2" charset="0"/>
-              <a:buChar char="‒"/>
-              <a:defRPr sz="1300" kern="1200">
-                <a:solidFill>
-                  <a:schemeClr val="tx1"/>
-                </a:solidFill>
-                <a:latin typeface="Bosch Sans Regular" panose="020B0604020202020204" pitchFamily="34" charset="0"/>
-                <a:ea typeface="+mn-ea"/>
-                <a:cs typeface="+mn-cs"/>
-              </a:defRPr>
-            </a:lvl4pPr>
-            <a:lvl5pPr marL="932331" indent="-183586" algn="l" defTabSz="914333" rtl="0" eaLnBrk="1" latinLnBrk="0" hangingPunct="1">
-              <a:lnSpc>
-                <a:spcPct val="103000"/>
-              </a:lnSpc>
-              <a:spcBef>
-                <a:spcPts val="500"/>
-              </a:spcBef>
-              <a:buFont typeface="Bosch Office Sans" pitchFamily="2" charset="0"/>
-              <a:buChar char="‒"/>
-              <a:defRPr sz="1300" kern="1200">
-                <a:solidFill>
-                  <a:schemeClr val="tx1"/>
-                </a:solidFill>
-                <a:latin typeface="Bosch Sans Regular" panose="020B0604020202020204" pitchFamily="34" charset="0"/>
-                <a:ea typeface="+mn-ea"/>
-                <a:cs typeface="+mn-cs"/>
-              </a:defRPr>
-            </a:lvl5pPr>
-            <a:lvl6pPr marL="932331" indent="-183586" algn="l" defTabSz="914333" rtl="0" eaLnBrk="1" latinLnBrk="0" hangingPunct="1">
-              <a:lnSpc>
-                <a:spcPct val="103000"/>
-              </a:lnSpc>
-              <a:spcBef>
-                <a:spcPts val="500"/>
-              </a:spcBef>
-              <a:buFont typeface="Bosch Office Sans" pitchFamily="2" charset="0"/>
-              <a:buChar char="‒"/>
-              <a:defRPr sz="1300" kern="1200">
-                <a:solidFill>
-                  <a:schemeClr val="tx1"/>
-                </a:solidFill>
-                <a:latin typeface="Bosch Sans Regular" panose="020B0604020202020204" pitchFamily="34" charset="0"/>
-                <a:ea typeface="+mn-ea"/>
-                <a:cs typeface="+mn-cs"/>
-              </a:defRPr>
-            </a:lvl6pPr>
-            <a:lvl7pPr marL="932331" indent="-183586" algn="l" defTabSz="914333" rtl="0" eaLnBrk="1" latinLnBrk="0" hangingPunct="1">
-              <a:lnSpc>
-                <a:spcPct val="103000"/>
-              </a:lnSpc>
-              <a:spcBef>
-                <a:spcPts val="500"/>
-              </a:spcBef>
-              <a:buFont typeface="Bosch Office Sans" pitchFamily="2" charset="0"/>
-              <a:buChar char="‒"/>
-              <a:defRPr sz="1300" kern="1200">
-                <a:solidFill>
-                  <a:schemeClr val="tx1"/>
-                </a:solidFill>
-                <a:latin typeface="Bosch Sans Regular" panose="020B0604020202020204" pitchFamily="34" charset="0"/>
-                <a:ea typeface="+mn-ea"/>
-                <a:cs typeface="+mn-cs"/>
-              </a:defRPr>
-            </a:lvl7pPr>
-            <a:lvl8pPr marL="932331" indent="-183586" algn="l" defTabSz="914333" rtl="0" eaLnBrk="1" latinLnBrk="0" hangingPunct="1">
-              <a:lnSpc>
-                <a:spcPct val="103000"/>
-              </a:lnSpc>
-              <a:spcBef>
-                <a:spcPts val="500"/>
-              </a:spcBef>
-              <a:buFont typeface="Bosch Office Sans" pitchFamily="2" charset="0"/>
-              <a:buChar char="‒"/>
-              <a:defRPr sz="1300" kern="1200">
-                <a:solidFill>
-                  <a:schemeClr val="tx1"/>
-                </a:solidFill>
-                <a:latin typeface="Bosch Sans Regular" panose="020B0604020202020204" pitchFamily="34" charset="0"/>
-                <a:ea typeface="+mn-ea"/>
-                <a:cs typeface="+mn-cs"/>
-              </a:defRPr>
-            </a:lvl8pPr>
-            <a:lvl9pPr marL="932331" indent="-183586" algn="l" defTabSz="914333" rtl="0" eaLnBrk="1" latinLnBrk="0" hangingPunct="1">
-              <a:lnSpc>
-                <a:spcPct val="103000"/>
-              </a:lnSpc>
-              <a:spcBef>
-                <a:spcPts val="500"/>
-              </a:spcBef>
-              <a:buFont typeface="Bosch Office Sans" pitchFamily="2" charset="0"/>
-              <a:buChar char="‒"/>
-              <a:defRPr sz="1300" kern="1200" baseline="0">
-                <a:solidFill>
-                  <a:schemeClr val="tx1"/>
-                </a:solidFill>
-                <a:latin typeface="Bosch Sans Regular" panose="020B0604020202020204" pitchFamily="34" charset="0"/>
-                <a:ea typeface="+mn-ea"/>
-                <a:cs typeface="+mn-cs"/>
-              </a:defRPr>
-            </a:lvl9pPr>
-          </a:lstStyle>
-          <a:p>
-            <a:pPr marL="0" indent="0" fontAlgn="auto">
-              <a:spcAft>
-                <a:spcPts val="0"/>
-              </a:spcAft>
-              <a:buNone/>
-            </a:pPr>
-            <a:r>
-              <a:rPr lang="en-US" b="1" dirty="0">
-                <a:solidFill>
-                  <a:srgbClr val="FFFFFF"/>
-                </a:solidFill>
-                <a:latin typeface="+mj-lt"/>
-              </a:rPr>
-              <a:t>This is a placeholder text</a:t>
-            </a:r>
-            <a:endParaRPr lang="en-US" sz="1400" dirty="0">
-              <a:solidFill>
-                <a:srgbClr val="FFFFFF"/>
-              </a:solidFill>
-              <a:latin typeface="+mj-lt"/>
-            </a:endParaRPr>
-          </a:p>
-          <a:p>
-            <a:pPr marL="0" indent="0" fontAlgn="auto">
-              <a:spcAft>
-                <a:spcPts val="0"/>
-              </a:spcAft>
-              <a:buNone/>
-            </a:pPr>
-            <a:endParaRPr lang="en-US" sz="1400" dirty="0">
-              <a:solidFill>
-                <a:schemeClr val="bg1"/>
-              </a:solidFill>
-              <a:latin typeface="+mj-lt"/>
-            </a:endParaRPr>
-          </a:p>
-          <a:p>
-            <a:pPr marL="0" indent="0" fontAlgn="auto">
-              <a:spcAft>
-                <a:spcPts val="0"/>
-              </a:spcAft>
-              <a:buNone/>
-            </a:pPr>
-            <a:r>
-              <a:rPr lang="en-US" sz="1400" dirty="0">
-                <a:solidFill>
-                  <a:schemeClr val="bg1"/>
-                </a:solidFill>
-                <a:latin typeface="+mj-lt"/>
-              </a:rPr>
-              <a:t>This text can be replaced with your own text.</a:t>
-            </a:r>
-            <a:endParaRPr lang="de-DE" sz="1400" dirty="0">
-              <a:solidFill>
-                <a:schemeClr val="bg1"/>
-              </a:solidFill>
-              <a:latin typeface="+mj-lt"/>
-            </a:endParaRPr>
-          </a:p>
-        </p:txBody>
-      </p:sp>
-      <p:sp>
-        <p:nvSpPr>
-          <p:cNvPr id="10" name="Inhaltsplatzhalter 7_"/>
-          <p:cNvSpPr txBox="1">
-            <a:spLocks/>
-          </p:cNvSpPr>
-          <p:nvPr/>
-        </p:nvSpPr>
-        <p:spPr>
-          <a:xfrm>
-            <a:off x="4296326" y="1760884"/>
-            <a:ext cx="2340000" cy="3136218"/>
-          </a:xfrm>
-          <a:prstGeom prst="rect">
-            <a:avLst/>
-          </a:prstGeom>
-          <a:solidFill>
-            <a:schemeClr val="accent2"/>
-          </a:solidFill>
-        </p:spPr>
-        <p:txBody>
-          <a:bodyPr vert="horz" lIns="180000" tIns="144000" rIns="90000" bIns="90000" rtlCol="0">
-            <a:noAutofit/>
-          </a:bodyPr>
-          <a:lstStyle>
-            <a:lvl1pPr marL="251982" indent="-251982" algn="l" defTabSz="914333" rtl="0" eaLnBrk="1" latinLnBrk="0" hangingPunct="1">
-              <a:lnSpc>
-                <a:spcPct val="107000"/>
-              </a:lnSpc>
-              <a:spcBef>
-                <a:spcPts val="500"/>
-              </a:spcBef>
-              <a:buFont typeface="Wingdings 3" panose="05040102010807070707" pitchFamily="18" charset="2"/>
-              <a:buChar char=""/>
-              <a:defRPr sz="1800" kern="1200">
-                <a:solidFill>
-                  <a:schemeClr val="tx1"/>
-                </a:solidFill>
-                <a:latin typeface="Bosch Sans Regular" panose="020B0604020202020204" pitchFamily="34" charset="0"/>
-                <a:ea typeface="+mn-ea"/>
-                <a:cs typeface="+mn-cs"/>
-              </a:defRPr>
-            </a:lvl1pPr>
-            <a:lvl2pPr marL="507563" indent="-273580" algn="l" defTabSz="914333" rtl="0" eaLnBrk="1" latinLnBrk="0" hangingPunct="1">
-              <a:lnSpc>
-                <a:spcPct val="103000"/>
-              </a:lnSpc>
-              <a:spcBef>
-                <a:spcPts val="500"/>
-              </a:spcBef>
-              <a:buFont typeface="Wingdings 3" panose="05040102010807070707" pitchFamily="18" charset="2"/>
-              <a:buChar char=""/>
-              <a:defRPr sz="1600" kern="1200">
-                <a:solidFill>
-                  <a:schemeClr val="tx1"/>
-                </a:solidFill>
-                <a:latin typeface="Bosch Sans Regular" panose="020B0604020202020204" pitchFamily="34" charset="0"/>
-                <a:ea typeface="+mn-ea"/>
-                <a:cs typeface="+mn-cs"/>
-              </a:defRPr>
-            </a:lvl2pPr>
-            <a:lvl3pPr marL="730746" indent="-205185" algn="l" defTabSz="914333" rtl="0" eaLnBrk="1" latinLnBrk="0" hangingPunct="1">
-              <a:lnSpc>
-                <a:spcPct val="102000"/>
-              </a:lnSpc>
-              <a:spcBef>
-                <a:spcPts val="500"/>
-              </a:spcBef>
-              <a:buFont typeface="Bosch Office Sans" pitchFamily="2" charset="0"/>
-              <a:buChar char="‒"/>
-              <a:defRPr sz="1400" kern="1200">
-                <a:solidFill>
-                  <a:schemeClr val="tx1"/>
-                </a:solidFill>
-                <a:latin typeface="Bosch Sans Regular" panose="020B0604020202020204" pitchFamily="34" charset="0"/>
-                <a:ea typeface="+mn-ea"/>
-                <a:cs typeface="+mn-cs"/>
-              </a:defRPr>
-            </a:lvl3pPr>
-            <a:lvl4pPr marL="932331" indent="-183586" algn="l" defTabSz="914333" rtl="0" eaLnBrk="1" latinLnBrk="0" hangingPunct="1">
-              <a:lnSpc>
-                <a:spcPct val="103000"/>
-              </a:lnSpc>
-              <a:spcBef>
-                <a:spcPts val="500"/>
-              </a:spcBef>
-              <a:buFont typeface="Bosch Office Sans" pitchFamily="2" charset="0"/>
-              <a:buChar char="‒"/>
-              <a:defRPr sz="1300" kern="1200">
-                <a:solidFill>
-                  <a:schemeClr val="tx1"/>
-                </a:solidFill>
-                <a:latin typeface="Bosch Sans Regular" panose="020B0604020202020204" pitchFamily="34" charset="0"/>
-                <a:ea typeface="+mn-ea"/>
-                <a:cs typeface="+mn-cs"/>
-              </a:defRPr>
-            </a:lvl4pPr>
-            <a:lvl5pPr marL="932331" indent="-183586" algn="l" defTabSz="914333" rtl="0" eaLnBrk="1" latinLnBrk="0" hangingPunct="1">
-              <a:lnSpc>
-                <a:spcPct val="103000"/>
-              </a:lnSpc>
-              <a:spcBef>
-                <a:spcPts val="500"/>
-              </a:spcBef>
-              <a:buFont typeface="Bosch Office Sans" pitchFamily="2" charset="0"/>
-              <a:buChar char="‒"/>
-              <a:defRPr sz="1300" kern="1200">
-                <a:solidFill>
-                  <a:schemeClr val="tx1"/>
-                </a:solidFill>
-                <a:latin typeface="Bosch Sans Regular" panose="020B0604020202020204" pitchFamily="34" charset="0"/>
-                <a:ea typeface="+mn-ea"/>
-                <a:cs typeface="+mn-cs"/>
-              </a:defRPr>
-            </a:lvl5pPr>
-            <a:lvl6pPr marL="932331" indent="-183586" algn="l" defTabSz="914333" rtl="0" eaLnBrk="1" latinLnBrk="0" hangingPunct="1">
-              <a:lnSpc>
-                <a:spcPct val="103000"/>
-              </a:lnSpc>
-              <a:spcBef>
-                <a:spcPts val="500"/>
-              </a:spcBef>
-              <a:buFont typeface="Bosch Office Sans" pitchFamily="2" charset="0"/>
-              <a:buChar char="‒"/>
-              <a:defRPr sz="1300" kern="1200">
-                <a:solidFill>
-                  <a:schemeClr val="tx1"/>
-                </a:solidFill>
-                <a:latin typeface="Bosch Sans Regular" panose="020B0604020202020204" pitchFamily="34" charset="0"/>
-                <a:ea typeface="+mn-ea"/>
-                <a:cs typeface="+mn-cs"/>
-              </a:defRPr>
-            </a:lvl6pPr>
-            <a:lvl7pPr marL="932331" indent="-183586" algn="l" defTabSz="914333" rtl="0" eaLnBrk="1" latinLnBrk="0" hangingPunct="1">
-              <a:lnSpc>
-                <a:spcPct val="103000"/>
-              </a:lnSpc>
-              <a:spcBef>
-                <a:spcPts val="500"/>
-              </a:spcBef>
-              <a:buFont typeface="Bosch Office Sans" pitchFamily="2" charset="0"/>
-              <a:buChar char="‒"/>
-              <a:defRPr sz="1300" kern="1200">
-                <a:solidFill>
-                  <a:schemeClr val="tx1"/>
-                </a:solidFill>
-                <a:latin typeface="Bosch Sans Regular" panose="020B0604020202020204" pitchFamily="34" charset="0"/>
-                <a:ea typeface="+mn-ea"/>
-                <a:cs typeface="+mn-cs"/>
-              </a:defRPr>
-            </a:lvl7pPr>
-            <a:lvl8pPr marL="932331" indent="-183586" algn="l" defTabSz="914333" rtl="0" eaLnBrk="1" latinLnBrk="0" hangingPunct="1">
-              <a:lnSpc>
-                <a:spcPct val="103000"/>
-              </a:lnSpc>
-              <a:spcBef>
-                <a:spcPts val="500"/>
-              </a:spcBef>
-              <a:buFont typeface="Bosch Office Sans" pitchFamily="2" charset="0"/>
-              <a:buChar char="‒"/>
-              <a:defRPr sz="1300" kern="1200">
-                <a:solidFill>
-                  <a:schemeClr val="tx1"/>
-                </a:solidFill>
-                <a:latin typeface="Bosch Sans Regular" panose="020B0604020202020204" pitchFamily="34" charset="0"/>
-                <a:ea typeface="+mn-ea"/>
-                <a:cs typeface="+mn-cs"/>
-              </a:defRPr>
-            </a:lvl8pPr>
-            <a:lvl9pPr marL="932331" indent="-183586" algn="l" defTabSz="914333" rtl="0" eaLnBrk="1" latinLnBrk="0" hangingPunct="1">
-              <a:lnSpc>
-                <a:spcPct val="103000"/>
-              </a:lnSpc>
-              <a:spcBef>
-                <a:spcPts val="500"/>
-              </a:spcBef>
-              <a:buFont typeface="Bosch Office Sans" pitchFamily="2" charset="0"/>
-              <a:buChar char="‒"/>
-              <a:defRPr sz="1300" kern="1200" baseline="0">
-                <a:solidFill>
-                  <a:schemeClr val="tx1"/>
-                </a:solidFill>
-                <a:latin typeface="Bosch Sans Regular" panose="020B0604020202020204" pitchFamily="34" charset="0"/>
-                <a:ea typeface="+mn-ea"/>
-                <a:cs typeface="+mn-cs"/>
-              </a:defRPr>
-            </a:lvl9pPr>
-          </a:lstStyle>
-          <a:p>
-            <a:pPr marL="0" indent="0" fontAlgn="auto">
-              <a:spcAft>
-                <a:spcPts val="0"/>
-              </a:spcAft>
-              <a:buNone/>
-            </a:pPr>
-            <a:r>
-              <a:rPr lang="en-US" b="1" dirty="0">
-                <a:solidFill>
-                  <a:srgbClr val="FFFFFF"/>
-                </a:solidFill>
-                <a:latin typeface="+mj-lt"/>
-              </a:rPr>
-              <a:t>This is a placeholder text</a:t>
-            </a:r>
-            <a:endParaRPr lang="en-US" sz="1400" dirty="0">
-              <a:solidFill>
-                <a:srgbClr val="FFFFFF"/>
-              </a:solidFill>
-              <a:latin typeface="+mj-lt"/>
-            </a:endParaRPr>
-          </a:p>
-          <a:p>
-            <a:pPr marL="0" indent="0" fontAlgn="auto">
-              <a:spcAft>
-                <a:spcPts val="0"/>
-              </a:spcAft>
-              <a:buNone/>
-            </a:pPr>
-            <a:endParaRPr lang="en-US" sz="1400" dirty="0">
-              <a:solidFill>
-                <a:schemeClr val="bg1"/>
-              </a:solidFill>
-              <a:latin typeface="+mj-lt"/>
-            </a:endParaRPr>
-          </a:p>
-          <a:p>
-            <a:pPr marL="0" indent="0" fontAlgn="auto">
-              <a:spcAft>
-                <a:spcPts val="0"/>
-              </a:spcAft>
-              <a:buNone/>
-            </a:pPr>
-            <a:r>
-              <a:rPr lang="en-US" sz="1400" dirty="0">
-                <a:solidFill>
-                  <a:schemeClr val="bg1"/>
-                </a:solidFill>
-                <a:latin typeface="+mj-lt"/>
-              </a:rPr>
-              <a:t>This text can be replaced with your own text.</a:t>
-            </a:r>
-            <a:endParaRPr lang="de-DE" sz="1400" dirty="0">
-              <a:solidFill>
-                <a:schemeClr val="bg1"/>
-              </a:solidFill>
-              <a:latin typeface="+mj-lt"/>
-            </a:endParaRPr>
-          </a:p>
-        </p:txBody>
-      </p:sp>
-      <p:sp>
-        <p:nvSpPr>
-          <p:cNvPr id="11" name="Inhaltsplatzhalter 7__"/>
-          <p:cNvSpPr txBox="1">
-            <a:spLocks/>
-          </p:cNvSpPr>
-          <p:nvPr/>
-        </p:nvSpPr>
-        <p:spPr>
-          <a:xfrm>
-            <a:off x="7000072" y="1760884"/>
-            <a:ext cx="2340000" cy="3136218"/>
-          </a:xfrm>
-          <a:prstGeom prst="rect">
-            <a:avLst/>
-          </a:prstGeom>
-          <a:solidFill>
-            <a:schemeClr val="accent1"/>
-          </a:solidFill>
-        </p:spPr>
-        <p:txBody>
-          <a:bodyPr vert="horz" lIns="180000" tIns="144000" rIns="90000" bIns="90000" rtlCol="0">
-            <a:noAutofit/>
-          </a:bodyPr>
-          <a:lstStyle>
-            <a:lvl1pPr marL="251982" indent="-251982" algn="l" defTabSz="914333" rtl="0" eaLnBrk="1" latinLnBrk="0" hangingPunct="1">
-              <a:lnSpc>
-                <a:spcPct val="107000"/>
-              </a:lnSpc>
-              <a:spcBef>
-                <a:spcPts val="500"/>
-              </a:spcBef>
-              <a:buFont typeface="Wingdings 3" panose="05040102010807070707" pitchFamily="18" charset="2"/>
-              <a:buChar char=""/>
-              <a:defRPr sz="1800" kern="1200">
-                <a:solidFill>
-                  <a:schemeClr val="tx1"/>
-                </a:solidFill>
-                <a:latin typeface="Bosch Sans Regular" panose="020B0604020202020204" pitchFamily="34" charset="0"/>
-                <a:ea typeface="+mn-ea"/>
-                <a:cs typeface="+mn-cs"/>
-              </a:defRPr>
-            </a:lvl1pPr>
-            <a:lvl2pPr marL="507563" indent="-273580" algn="l" defTabSz="914333" rtl="0" eaLnBrk="1" latinLnBrk="0" hangingPunct="1">
-              <a:lnSpc>
-                <a:spcPct val="103000"/>
-              </a:lnSpc>
-              <a:spcBef>
-                <a:spcPts val="500"/>
-              </a:spcBef>
-              <a:buFont typeface="Wingdings 3" panose="05040102010807070707" pitchFamily="18" charset="2"/>
-              <a:buChar char=""/>
-              <a:defRPr sz="1600" kern="1200">
-                <a:solidFill>
-                  <a:schemeClr val="tx1"/>
-                </a:solidFill>
-                <a:latin typeface="Bosch Sans Regular" panose="020B0604020202020204" pitchFamily="34" charset="0"/>
-                <a:ea typeface="+mn-ea"/>
-                <a:cs typeface="+mn-cs"/>
-              </a:defRPr>
-            </a:lvl2pPr>
-            <a:lvl3pPr marL="730746" indent="-205185" algn="l" defTabSz="914333" rtl="0" eaLnBrk="1" latinLnBrk="0" hangingPunct="1">
-              <a:lnSpc>
-                <a:spcPct val="102000"/>
-              </a:lnSpc>
-              <a:spcBef>
-                <a:spcPts val="500"/>
-              </a:spcBef>
-              <a:buFont typeface="Bosch Office Sans" pitchFamily="2" charset="0"/>
-              <a:buChar char="‒"/>
-              <a:defRPr sz="1400" kern="1200">
-                <a:solidFill>
-                  <a:schemeClr val="tx1"/>
-                </a:solidFill>
-                <a:latin typeface="Bosch Sans Regular" panose="020B0604020202020204" pitchFamily="34" charset="0"/>
-                <a:ea typeface="+mn-ea"/>
-                <a:cs typeface="+mn-cs"/>
-              </a:defRPr>
-            </a:lvl3pPr>
-            <a:lvl4pPr marL="932331" indent="-183586" algn="l" defTabSz="914333" rtl="0" eaLnBrk="1" latinLnBrk="0" hangingPunct="1">
-              <a:lnSpc>
-                <a:spcPct val="103000"/>
-              </a:lnSpc>
-              <a:spcBef>
-                <a:spcPts val="500"/>
-              </a:spcBef>
-              <a:buFont typeface="Bosch Office Sans" pitchFamily="2" charset="0"/>
-              <a:buChar char="‒"/>
-              <a:defRPr sz="1300" kern="1200">
-                <a:solidFill>
-                  <a:schemeClr val="tx1"/>
-                </a:solidFill>
-                <a:latin typeface="Bosch Sans Regular" panose="020B0604020202020204" pitchFamily="34" charset="0"/>
-                <a:ea typeface="+mn-ea"/>
-                <a:cs typeface="+mn-cs"/>
-              </a:defRPr>
-            </a:lvl4pPr>
-            <a:lvl5pPr marL="932331" indent="-183586" algn="l" defTabSz="914333" rtl="0" eaLnBrk="1" latinLnBrk="0" hangingPunct="1">
-              <a:lnSpc>
-                <a:spcPct val="103000"/>
-              </a:lnSpc>
-              <a:spcBef>
-                <a:spcPts val="500"/>
-              </a:spcBef>
-              <a:buFont typeface="Bosch Office Sans" pitchFamily="2" charset="0"/>
-              <a:buChar char="‒"/>
-              <a:defRPr sz="1300" kern="1200">
-                <a:solidFill>
-                  <a:schemeClr val="tx1"/>
-                </a:solidFill>
-                <a:latin typeface="Bosch Sans Regular" panose="020B0604020202020204" pitchFamily="34" charset="0"/>
-                <a:ea typeface="+mn-ea"/>
-                <a:cs typeface="+mn-cs"/>
-              </a:defRPr>
-            </a:lvl5pPr>
-            <a:lvl6pPr marL="932331" indent="-183586" algn="l" defTabSz="914333" rtl="0" eaLnBrk="1" latinLnBrk="0" hangingPunct="1">
-              <a:lnSpc>
-                <a:spcPct val="103000"/>
-              </a:lnSpc>
-              <a:spcBef>
-                <a:spcPts val="500"/>
-              </a:spcBef>
-              <a:buFont typeface="Bosch Office Sans" pitchFamily="2" charset="0"/>
-              <a:buChar char="‒"/>
-              <a:defRPr sz="1300" kern="1200">
-                <a:solidFill>
-                  <a:schemeClr val="tx1"/>
-                </a:solidFill>
-                <a:latin typeface="Bosch Sans Regular" panose="020B0604020202020204" pitchFamily="34" charset="0"/>
-                <a:ea typeface="+mn-ea"/>
-                <a:cs typeface="+mn-cs"/>
-              </a:defRPr>
-            </a:lvl6pPr>
-            <a:lvl7pPr marL="932331" indent="-183586" algn="l" defTabSz="914333" rtl="0" eaLnBrk="1" latinLnBrk="0" hangingPunct="1">
-              <a:lnSpc>
-                <a:spcPct val="103000"/>
-              </a:lnSpc>
-              <a:spcBef>
-                <a:spcPts val="500"/>
-              </a:spcBef>
-              <a:buFont typeface="Bosch Office Sans" pitchFamily="2" charset="0"/>
-              <a:buChar char="‒"/>
-              <a:defRPr sz="1300" kern="1200">
-                <a:solidFill>
-                  <a:schemeClr val="tx1"/>
-                </a:solidFill>
-                <a:latin typeface="Bosch Sans Regular" panose="020B0604020202020204" pitchFamily="34" charset="0"/>
-                <a:ea typeface="+mn-ea"/>
-                <a:cs typeface="+mn-cs"/>
-              </a:defRPr>
-            </a:lvl7pPr>
-            <a:lvl8pPr marL="932331" indent="-183586" algn="l" defTabSz="914333" rtl="0" eaLnBrk="1" latinLnBrk="0" hangingPunct="1">
-              <a:lnSpc>
-                <a:spcPct val="103000"/>
-              </a:lnSpc>
-              <a:spcBef>
-                <a:spcPts val="500"/>
-              </a:spcBef>
-              <a:buFont typeface="Bosch Office Sans" pitchFamily="2" charset="0"/>
-              <a:buChar char="‒"/>
-              <a:defRPr sz="1300" kern="1200">
-                <a:solidFill>
-                  <a:schemeClr val="tx1"/>
-                </a:solidFill>
-                <a:latin typeface="Bosch Sans Regular" panose="020B0604020202020204" pitchFamily="34" charset="0"/>
-                <a:ea typeface="+mn-ea"/>
-                <a:cs typeface="+mn-cs"/>
-              </a:defRPr>
-            </a:lvl8pPr>
-            <a:lvl9pPr marL="932331" indent="-183586" algn="l" defTabSz="914333" rtl="0" eaLnBrk="1" latinLnBrk="0" hangingPunct="1">
-              <a:lnSpc>
-                <a:spcPct val="103000"/>
-              </a:lnSpc>
-              <a:spcBef>
-                <a:spcPts val="500"/>
-              </a:spcBef>
-              <a:buFont typeface="Bosch Office Sans" pitchFamily="2" charset="0"/>
-              <a:buChar char="‒"/>
-              <a:defRPr sz="1300" kern="1200" baseline="0">
-                <a:solidFill>
-                  <a:schemeClr val="tx1"/>
-                </a:solidFill>
-                <a:latin typeface="Bosch Sans Regular" panose="020B0604020202020204" pitchFamily="34" charset="0"/>
-                <a:ea typeface="+mn-ea"/>
-                <a:cs typeface="+mn-cs"/>
-              </a:defRPr>
-            </a:lvl9pPr>
-          </a:lstStyle>
-          <a:p>
-            <a:pPr marL="0" indent="0" fontAlgn="auto">
-              <a:spcAft>
-                <a:spcPts val="0"/>
-              </a:spcAft>
-              <a:buNone/>
-            </a:pPr>
-            <a:r>
-              <a:rPr lang="en-US" b="1" dirty="0">
-                <a:solidFill>
-                  <a:srgbClr val="FFFFFF"/>
-                </a:solidFill>
-                <a:latin typeface="+mj-lt"/>
-              </a:rPr>
-              <a:t>This is a placeholder text</a:t>
-            </a:r>
-            <a:endParaRPr lang="en-US" sz="1400" dirty="0">
-              <a:solidFill>
-                <a:srgbClr val="FFFFFF"/>
-              </a:solidFill>
-              <a:latin typeface="+mj-lt"/>
-            </a:endParaRPr>
-          </a:p>
-          <a:p>
-            <a:pPr marL="0" indent="0" fontAlgn="auto">
-              <a:spcAft>
-                <a:spcPts val="0"/>
-              </a:spcAft>
-              <a:buNone/>
-            </a:pPr>
-            <a:endParaRPr lang="en-US" sz="1400" dirty="0">
-              <a:solidFill>
-                <a:schemeClr val="bg1"/>
-              </a:solidFill>
-              <a:latin typeface="+mj-lt"/>
-            </a:endParaRPr>
-          </a:p>
-          <a:p>
-            <a:pPr marL="0" indent="0" fontAlgn="auto">
-              <a:spcAft>
-                <a:spcPts val="0"/>
-              </a:spcAft>
-              <a:buNone/>
-            </a:pPr>
-            <a:r>
-              <a:rPr lang="en-US" sz="1400" dirty="0">
-                <a:solidFill>
-                  <a:schemeClr val="bg1"/>
-                </a:solidFill>
-                <a:latin typeface="+mj-lt"/>
-              </a:rPr>
-              <a:t>This text can be replaced with your own text.</a:t>
-            </a:r>
-            <a:endParaRPr lang="de-DE" sz="1400" dirty="0">
-              <a:solidFill>
-                <a:schemeClr val="bg1"/>
-              </a:solidFill>
-              <a:latin typeface="+mj-lt"/>
-            </a:endParaRPr>
-          </a:p>
-        </p:txBody>
-      </p:sp>
-      <p:sp>
-        <p:nvSpPr>
-          <p:cNvPr id="14" name="Gleichschenkliges Dreieck 13"/>
-          <p:cNvSpPr/>
-          <p:nvPr/>
-        </p:nvSpPr>
-        <p:spPr>
-          <a:xfrm rot="5400000">
-            <a:off x="3802362" y="2306695"/>
-            <a:ext cx="431515" cy="180000"/>
-          </a:xfrm>
-          <a:prstGeom prst="triangle">
-            <a:avLst>
-              <a:gd name="adj" fmla="val 48989"/>
-            </a:avLst>
-          </a:prstGeom>
-          <a:solidFill>
-            <a:schemeClr val="accent1"/>
-          </a:solidFill>
-          <a:ln w="9525" cap="flat" cmpd="sng" algn="ctr">
-            <a:noFill/>
-            <a:prstDash val="solid"/>
-          </a:ln>
-          <a:effectLst/>
-        </p:spPr>
-        <p:txBody>
-          <a:bodyPr rtlCol="0" anchor="ctr"/>
-          <a:lstStyle/>
-          <a:p>
-            <a:pPr marL="0" marR="0" indent="0" algn="ctr" defTabSz="914400" eaLnBrk="1" fontAlgn="auto" latinLnBrk="0" hangingPunct="1">
-              <a:lnSpc>
-                <a:spcPct val="100000"/>
-              </a:lnSpc>
-              <a:spcBef>
-                <a:spcPts val="0"/>
-              </a:spcBef>
-              <a:spcAft>
-                <a:spcPts val="0"/>
-              </a:spcAft>
-              <a:buClrTx/>
-              <a:buSzTx/>
-              <a:buFontTx/>
-              <a:buNone/>
-              <a:tabLst/>
-            </a:pPr>
-            <a:endParaRPr kumimoji="0" lang="de-DE" sz="1800" b="0" i="0" u="none" strike="noStrike" kern="0" cap="none" spc="0" normalizeH="0" baseline="0" noProof="0" dirty="0">
-              <a:ln>
-                <a:noFill/>
-              </a:ln>
-              <a:solidFill>
-                <a:srgbClr val="000000"/>
-              </a:solidFill>
-              <a:effectLst/>
-              <a:uLnTx/>
-              <a:uFillTx/>
-              <a:latin typeface="+mn-lt"/>
-              <a:ea typeface="+mn-ea"/>
-              <a:cs typeface="+mn-cs"/>
-            </a:endParaRPr>
-          </a:p>
-        </p:txBody>
-      </p:sp>
-      <p:sp>
-        <p:nvSpPr>
-          <p:cNvPr id="15" name="Gleichschenkliges Dreieck 14"/>
-          <p:cNvSpPr/>
-          <p:nvPr/>
-        </p:nvSpPr>
-        <p:spPr>
-          <a:xfrm rot="5400000">
-            <a:off x="6506109" y="2306696"/>
-            <a:ext cx="431515" cy="180000"/>
-          </a:xfrm>
-          <a:prstGeom prst="triangle">
-            <a:avLst>
-              <a:gd name="adj" fmla="val 45238"/>
-            </a:avLst>
-          </a:prstGeom>
-          <a:solidFill>
-            <a:schemeClr val="accent2"/>
-          </a:solidFill>
-          <a:ln w="9525" cap="flat" cmpd="sng" algn="ctr">
-            <a:noFill/>
-            <a:prstDash val="solid"/>
-          </a:ln>
-          <a:effectLst/>
-        </p:spPr>
-        <p:txBody>
-          <a:bodyPr rtlCol="0" anchor="ctr"/>
-          <a:lstStyle/>
-          <a:p>
-            <a:pPr marL="0" marR="0" indent="0" algn="ctr" defTabSz="914400" eaLnBrk="1" fontAlgn="auto" latinLnBrk="0" hangingPunct="1">
-              <a:lnSpc>
-                <a:spcPct val="100000"/>
-              </a:lnSpc>
-              <a:spcBef>
-                <a:spcPts val="0"/>
-              </a:spcBef>
-              <a:spcAft>
-                <a:spcPts val="0"/>
-              </a:spcAft>
-              <a:buClrTx/>
-              <a:buSzTx/>
-              <a:buFontTx/>
-              <a:buNone/>
-              <a:tabLst/>
-            </a:pPr>
-            <a:endParaRPr kumimoji="0" lang="de-DE" sz="1800" b="0" i="0" u="none" strike="noStrike" kern="0" cap="none" spc="0" normalizeH="0" baseline="0" noProof="0" dirty="0">
-              <a:ln>
-                <a:noFill/>
-              </a:ln>
-              <a:solidFill>
-                <a:srgbClr val="000000"/>
-              </a:solidFill>
-              <a:effectLst/>
-              <a:uLnTx/>
-              <a:uFillTx/>
-              <a:latin typeface="+mn-lt"/>
-              <a:ea typeface="+mn-ea"/>
-              <a:cs typeface="+mn-cs"/>
-            </a:endParaRPr>
-          </a:p>
-        </p:txBody>
-      </p:sp>
       <p:pic>
         <p:nvPicPr>
           <p:cNvPr id="17" name="Grafik 16">
@@ -15078,6 +17124,43 @@
           <a:xfrm>
             <a:off x="7695135" y="3639416"/>
             <a:ext cx="928019" cy="928019"/>
+          </a:xfrm>
+          <a:prstGeom prst="rect">
+            <a:avLst/>
+          </a:prstGeom>
+        </p:spPr>
+      </p:pic>
+      <p:pic>
+        <p:nvPicPr>
+          <p:cNvPr id="8" name="Picture 7">
+            <a:extLst>
+              <a:ext uri="{FF2B5EF4-FFF2-40B4-BE49-F238E27FC236}">
+                <a16:creationId xmlns:a16="http://schemas.microsoft.com/office/drawing/2014/main" id="{DC290A96-C115-5315-5DCC-CA0695713704}"/>
+              </a:ext>
+            </a:extLst>
+          </p:cNvPr>
+          <p:cNvPicPr>
+            <a:picLocks noChangeAspect="1"/>
+          </p:cNvPicPr>
+          <p:nvPr/>
+        </p:nvPicPr>
+        <p:blipFill>
+          <a:blip r:embed="rId7">
+            <a:extLst>
+              <a:ext uri="{28A0092B-C50C-407E-A947-70E740481C1C}">
+                <a14:useLocalDpi xmlns:a14="http://schemas.microsoft.com/office/drawing/2010/main" val="0"/>
+              </a:ext>
+            </a:extLst>
+          </a:blip>
+          <a:srcRect l="46056" t="62060" r="21081" b="-828"/>
+          <a:stretch>
+            <a:fillRect/>
+          </a:stretch>
+        </p:blipFill>
+        <p:spPr>
+          <a:xfrm>
+            <a:off x="2076281" y="1226889"/>
+            <a:ext cx="6580764" cy="4295724"/>
           </a:xfrm>
           <a:prstGeom prst="rect">
             <a:avLst/>
@@ -15153,6 +17236,18 @@
 </file>
 
 <file path=ppt/tags/tag15.xml><?xml version="1.0" encoding="utf-8"?>
+<p:tagLst xmlns:a="http://schemas.openxmlformats.org/drawingml/2006/main" xmlns:r="http://schemas.openxmlformats.org/officeDocument/2006/relationships" xmlns:p="http://schemas.openxmlformats.org/presentationml/2006/main">
+  <p:tag name="SAXCONVERTED" val="2"/>
+</p:tagLst>
+</file>
+
+<file path=ppt/tags/tag16.xml><?xml version="1.0" encoding="utf-8"?>
+<p:tagLst xmlns:a="http://schemas.openxmlformats.org/drawingml/2006/main" xmlns:r="http://schemas.openxmlformats.org/officeDocument/2006/relationships" xmlns:p="http://schemas.openxmlformats.org/presentationml/2006/main">
+  <p:tag name="SAXCONVERTED" val="2"/>
+</p:tagLst>
+</file>
+
+<file path=ppt/tags/tag17.xml><?xml version="1.0" encoding="utf-8"?>
 <p:tagLst xmlns:a="http://schemas.openxmlformats.org/drawingml/2006/main" xmlns:r="http://schemas.openxmlformats.org/officeDocument/2006/relationships" xmlns:p="http://schemas.openxmlformats.org/presentationml/2006/main">
   <p:tag name="SAXCONVERTED" val="2"/>
 </p:tagLst>
@@ -16139,28 +18234,93 @@
 </a:themeOverride>
 </file>
 
-<file path=customXml/item1.xml><?xml version="1.0" encoding="utf-8"?>
-<sax_Colors>
-  <Line size="7">
-    <Color val="9e2896" tooltip="Bosch Purple 40"/>
-    <Color val="551151" tooltip="Bosch Purple 20"/>
-  </Line>
-  <Line size="7">
-    <Color val="007bc0" tooltip="Bosch Blue 50"/>
-    <Color val="004975" tooltip="Bosch Blue 30"/>
-  </Line>
-  <Line size="7">
-    <Color val="18837e" tooltip="Bosch Turquoise 50"/>
-    <Color val="0a4f4b" tooltip="Bosch Turquoise 30"/>
-  </Line>
-  <Line size="7">
-    <Color val="00884a" tooltip="Bosch Green 50"/>
-    <Color val="00512a" tooltip="Bosch Green 30"/>
-  </Line>
-</sax_Colors>
+<file path=ppt/theme/themeOverride8.xml><?xml version="1.0" encoding="utf-8"?>
+<a:themeOverride xmlns:a="http://schemas.openxmlformats.org/drawingml/2006/main">
+  <a:clrScheme name="Bosch Blau">
+    <a:dk1>
+      <a:sysClr val="windowText" lastClr="000000"/>
+    </a:dk1>
+    <a:lt1>
+      <a:sysClr val="window" lastClr="FFFFFF"/>
+    </a:lt1>
+    <a:dk2>
+      <a:srgbClr val="424C58"/>
+    </a:dk2>
+    <a:lt2>
+      <a:srgbClr val="B2B3B5"/>
+    </a:lt2>
+    <a:accent1>
+      <a:srgbClr val="007BC0"/>
+    </a:accent1>
+    <a:accent2>
+      <a:srgbClr val="004975"/>
+    </a:accent2>
+    <a:accent3>
+      <a:srgbClr val="007BC0"/>
+    </a:accent3>
+    <a:accent4>
+      <a:srgbClr val="004975"/>
+    </a:accent4>
+    <a:accent5>
+      <a:srgbClr val="007BC0"/>
+    </a:accent5>
+    <a:accent6>
+      <a:srgbClr val="004975"/>
+    </a:accent6>
+    <a:hlink>
+      <a:srgbClr val="738CB4"/>
+    </a:hlink>
+    <a:folHlink>
+      <a:srgbClr val="B0BBD0"/>
+    </a:folHlink>
+  </a:clrScheme>
+</a:themeOverride>
 </file>
 
-<file path=customXml/item2.xml><?xml version="1.0" encoding="utf-8"?>
+<file path=ppt/theme/themeOverride9.xml><?xml version="1.0" encoding="utf-8"?>
+<a:themeOverride xmlns:a="http://schemas.openxmlformats.org/drawingml/2006/main">
+  <a:clrScheme name="Bosch Blau">
+    <a:dk1>
+      <a:sysClr val="windowText" lastClr="000000"/>
+    </a:dk1>
+    <a:lt1>
+      <a:sysClr val="window" lastClr="FFFFFF"/>
+    </a:lt1>
+    <a:dk2>
+      <a:srgbClr val="424C58"/>
+    </a:dk2>
+    <a:lt2>
+      <a:srgbClr val="B2B3B5"/>
+    </a:lt2>
+    <a:accent1>
+      <a:srgbClr val="007BC0"/>
+    </a:accent1>
+    <a:accent2>
+      <a:srgbClr val="004975"/>
+    </a:accent2>
+    <a:accent3>
+      <a:srgbClr val="007BC0"/>
+    </a:accent3>
+    <a:accent4>
+      <a:srgbClr val="004975"/>
+    </a:accent4>
+    <a:accent5>
+      <a:srgbClr val="007BC0"/>
+    </a:accent5>
+    <a:accent6>
+      <a:srgbClr val="004975"/>
+    </a:accent6>
+    <a:hlink>
+      <a:srgbClr val="738CB4"/>
+    </a:hlink>
+    <a:folHlink>
+      <a:srgbClr val="B0BBD0"/>
+    </a:folHlink>
+  </a:clrScheme>
+</a:themeOverride>
+</file>
+
+<file path=customXml/item1.xml><?xml version="1.0" encoding="utf-8"?>
 <saxML>
   <saxMLTemplate>presentation_169</saxMLTemplate>
   <Variablen>
@@ -16333,14 +18493,35 @@
 </saxML>
 </file>
 
+<file path=customXml/item2.xml><?xml version="1.0" encoding="utf-8"?>
+<sax_Colors>
+  <Line size="7">
+    <Color val="9e2896" tooltip="Bosch Purple 40"/>
+    <Color val="551151" tooltip="Bosch Purple 20"/>
+  </Line>
+  <Line size="7">
+    <Color val="007bc0" tooltip="Bosch Blue 50"/>
+    <Color val="004975" tooltip="Bosch Blue 30"/>
+  </Line>
+  <Line size="7">
+    <Color val="18837e" tooltip="Bosch Turquoise 50"/>
+    <Color val="0a4f4b" tooltip="Bosch Turquoise 30"/>
+  </Line>
+  <Line size="7">
+    <Color val="00884a" tooltip="Bosch Green 50"/>
+    <Color val="00512a" tooltip="Bosch Green 30"/>
+  </Line>
+</sax_Colors>
+</file>
+
 <file path=customXml/itemProps1.xml><?xml version="1.0" encoding="utf-8"?>
-<ds:datastoreItem xmlns:ds="http://schemas.openxmlformats.org/officeDocument/2006/customXml" ds:itemID="{D0252559-44F8-474C-B66D-E357B88E32C2}">
+<ds:datastoreItem xmlns:ds="http://schemas.openxmlformats.org/officeDocument/2006/customXml" ds:itemID="{304CF217-3C90-4AA0-B541-CE45F9BD305E}">
   <ds:schemaRefs/>
 </ds:datastoreItem>
 </file>
 
 <file path=customXml/itemProps2.xml><?xml version="1.0" encoding="utf-8"?>
-<ds:datastoreItem xmlns:ds="http://schemas.openxmlformats.org/officeDocument/2006/customXml" ds:itemID="{304CF217-3C90-4AA0-B541-CE45F9BD305E}">
+<ds:datastoreItem xmlns:ds="http://schemas.openxmlformats.org/officeDocument/2006/customXml" ds:itemID="{D0252559-44F8-474C-B66D-E357B88E32C2}">
   <ds:schemaRefs/>
 </ds:datastoreItem>
 </file>